--- a/ゲーム科3年/00_前期/オンラインゲームプログラミングⅠ/02_データの送受信.pptx
+++ b/ゲーム科3年/00_前期/オンラインゲームプログラミングⅠ/02_データの送受信.pptx
@@ -14,6 +14,7 @@
     <p:sldId id="262" r:id="rId8"/>
     <p:sldId id="263" r:id="rId9"/>
     <p:sldId id="264" r:id="rId10"/>
+    <p:sldId id="265" r:id="rId11"/>
   </p:sldIdLst>
   <p:sldSz cx="12192000" cy="6858000"/>
   <p:notesSz cx="6858000" cy="9144000"/>
@@ -267,7 +268,7 @@
           <a:p>
             <a:fld id="{E9CC885B-4903-4D54-9A93-00025F12DED9}" type="datetimeFigureOut">
               <a:rPr kumimoji="1" lang="ja-JP" altLang="en-US" smtClean="0"/>
-              <a:t>2025/8/28</a:t>
+              <a:t>2025/10/6</a:t>
             </a:fld>
             <a:endParaRPr kumimoji="1" lang="ja-JP" altLang="en-US"/>
           </a:p>
@@ -497,7 +498,7 @@
           <a:p>
             <a:fld id="{E9CC885B-4903-4D54-9A93-00025F12DED9}" type="datetimeFigureOut">
               <a:rPr kumimoji="1" lang="ja-JP" altLang="en-US" smtClean="0"/>
-              <a:t>2025/8/28</a:t>
+              <a:t>2025/10/6</a:t>
             </a:fld>
             <a:endParaRPr kumimoji="1" lang="ja-JP" altLang="en-US"/>
           </a:p>
@@ -737,7 +738,7 @@
           <a:p>
             <a:fld id="{E9CC885B-4903-4D54-9A93-00025F12DED9}" type="datetimeFigureOut">
               <a:rPr kumimoji="1" lang="ja-JP" altLang="en-US" smtClean="0"/>
-              <a:t>2025/8/28</a:t>
+              <a:t>2025/10/6</a:t>
             </a:fld>
             <a:endParaRPr kumimoji="1" lang="ja-JP" altLang="en-US"/>
           </a:p>
@@ -967,7 +968,7 @@
           <a:p>
             <a:fld id="{E9CC885B-4903-4D54-9A93-00025F12DED9}" type="datetimeFigureOut">
               <a:rPr kumimoji="1" lang="ja-JP" altLang="en-US" smtClean="0"/>
-              <a:t>2025/8/28</a:t>
+              <a:t>2025/10/6</a:t>
             </a:fld>
             <a:endParaRPr kumimoji="1" lang="ja-JP" altLang="en-US"/>
           </a:p>
@@ -1242,7 +1243,7 @@
           <a:p>
             <a:fld id="{E9CC885B-4903-4D54-9A93-00025F12DED9}" type="datetimeFigureOut">
               <a:rPr kumimoji="1" lang="ja-JP" altLang="en-US" smtClean="0"/>
-              <a:t>2025/8/28</a:t>
+              <a:t>2025/10/6</a:t>
             </a:fld>
             <a:endParaRPr kumimoji="1" lang="ja-JP" altLang="en-US"/>
           </a:p>
@@ -1571,7 +1572,7 @@
           <a:p>
             <a:fld id="{E9CC885B-4903-4D54-9A93-00025F12DED9}" type="datetimeFigureOut">
               <a:rPr kumimoji="1" lang="ja-JP" altLang="en-US" smtClean="0"/>
-              <a:t>2025/8/28</a:t>
+              <a:t>2025/10/6</a:t>
             </a:fld>
             <a:endParaRPr kumimoji="1" lang="ja-JP" altLang="en-US"/>
           </a:p>
@@ -2047,7 +2048,7 @@
           <a:p>
             <a:fld id="{E9CC885B-4903-4D54-9A93-00025F12DED9}" type="datetimeFigureOut">
               <a:rPr kumimoji="1" lang="ja-JP" altLang="en-US" smtClean="0"/>
-              <a:t>2025/8/28</a:t>
+              <a:t>2025/10/6</a:t>
             </a:fld>
             <a:endParaRPr kumimoji="1" lang="ja-JP" altLang="en-US"/>
           </a:p>
@@ -2188,7 +2189,7 @@
           <a:p>
             <a:fld id="{E9CC885B-4903-4D54-9A93-00025F12DED9}" type="datetimeFigureOut">
               <a:rPr kumimoji="1" lang="ja-JP" altLang="en-US" smtClean="0"/>
-              <a:t>2025/8/28</a:t>
+              <a:t>2025/10/6</a:t>
             </a:fld>
             <a:endParaRPr kumimoji="1" lang="ja-JP" altLang="en-US"/>
           </a:p>
@@ -2301,7 +2302,7 @@
           <a:p>
             <a:fld id="{E9CC885B-4903-4D54-9A93-00025F12DED9}" type="datetimeFigureOut">
               <a:rPr kumimoji="1" lang="ja-JP" altLang="en-US" smtClean="0"/>
-              <a:t>2025/8/28</a:t>
+              <a:t>2025/10/6</a:t>
             </a:fld>
             <a:endParaRPr kumimoji="1" lang="ja-JP" altLang="en-US"/>
           </a:p>
@@ -2644,7 +2645,7 @@
           <a:p>
             <a:fld id="{E9CC885B-4903-4D54-9A93-00025F12DED9}" type="datetimeFigureOut">
               <a:rPr kumimoji="1" lang="ja-JP" altLang="en-US" smtClean="0"/>
-              <a:t>2025/8/28</a:t>
+              <a:t>2025/10/6</a:t>
             </a:fld>
             <a:endParaRPr kumimoji="1" lang="ja-JP" altLang="en-US"/>
           </a:p>
@@ -2932,7 +2933,7 @@
           <a:p>
             <a:fld id="{E9CC885B-4903-4D54-9A93-00025F12DED9}" type="datetimeFigureOut">
               <a:rPr kumimoji="1" lang="ja-JP" altLang="en-US" smtClean="0"/>
-              <a:t>2025/8/28</a:t>
+              <a:t>2025/10/6</a:t>
             </a:fld>
             <a:endParaRPr kumimoji="1" lang="ja-JP" altLang="en-US"/>
           </a:p>
@@ -3205,7 +3206,7 @@
           <a:p>
             <a:fld id="{E9CC885B-4903-4D54-9A93-00025F12DED9}" type="datetimeFigureOut">
               <a:rPr kumimoji="1" lang="ja-JP" altLang="en-US" smtClean="0"/>
-              <a:t>2025/8/28</a:t>
+              <a:t>2025/10/6</a:t>
             </a:fld>
             <a:endParaRPr kumimoji="1" lang="ja-JP" altLang="en-US"/>
           </a:p>
@@ -4028,6 +4029,229 @@
 </p:sld>
 </file>
 
+<file path=ppt/slides/slide10.xml><?xml version="1.0" encoding="utf-8"?>
+<p:sld xmlns:a="http://schemas.openxmlformats.org/drawingml/2006/main" xmlns:r="http://schemas.openxmlformats.org/officeDocument/2006/relationships" xmlns:p="http://schemas.openxmlformats.org/presentationml/2006/main">
+  <p:cSld>
+    <p:spTree>
+      <p:nvGrpSpPr>
+        <p:cNvPr id="1" name=""/>
+        <p:cNvGrpSpPr/>
+        <p:nvPr/>
+      </p:nvGrpSpPr>
+      <p:grpSpPr>
+        <a:xfrm>
+          <a:off x="0" y="0"/>
+          <a:ext cx="0" cy="0"/>
+          <a:chOff x="0" y="0"/>
+          <a:chExt cx="0" cy="0"/>
+        </a:xfrm>
+      </p:grpSpPr>
+      <p:sp>
+        <p:nvSpPr>
+          <p:cNvPr id="4" name="テキスト ボックス 3">
+            <a:extLst>
+              <a:ext uri="{FF2B5EF4-FFF2-40B4-BE49-F238E27FC236}">
+                <a16:creationId xmlns:a16="http://schemas.microsoft.com/office/drawing/2014/main" id="{5A13BF46-B8C5-48AA-8308-C9ECFF431A18}"/>
+              </a:ext>
+            </a:extLst>
+          </p:cNvPr>
+          <p:cNvSpPr txBox="1"/>
+          <p:nvPr/>
+        </p:nvSpPr>
+        <p:spPr>
+          <a:xfrm>
+            <a:off x="567542" y="491954"/>
+            <a:ext cx="3057247" cy="584775"/>
+          </a:xfrm>
+          <a:prstGeom prst="rect">
+            <a:avLst/>
+          </a:prstGeom>
+          <a:noFill/>
+        </p:spPr>
+        <p:txBody>
+          <a:bodyPr wrap="none" rtlCol="0">
+            <a:spAutoFit/>
+          </a:bodyPr>
+          <a:lstStyle/>
+          <a:p>
+            <a:r>
+              <a:rPr kumimoji="1" lang="ja-JP" altLang="en-US" sz="3200" b="1" u="sng" dirty="0"/>
+              <a:t>データの送受信</a:t>
+            </a:r>
+          </a:p>
+        </p:txBody>
+      </p:sp>
+      <p:sp>
+        <p:nvSpPr>
+          <p:cNvPr id="6" name="テキスト ボックス 5">
+            <a:extLst>
+              <a:ext uri="{FF2B5EF4-FFF2-40B4-BE49-F238E27FC236}">
+                <a16:creationId xmlns:a16="http://schemas.microsoft.com/office/drawing/2014/main" id="{55830AD6-028B-4C4E-80BF-B70DFC1C3A46}"/>
+              </a:ext>
+            </a:extLst>
+          </p:cNvPr>
+          <p:cNvSpPr txBox="1"/>
+          <p:nvPr/>
+        </p:nvSpPr>
+        <p:spPr>
+          <a:xfrm>
+            <a:off x="567542" y="1216429"/>
+            <a:ext cx="11574002" cy="461665"/>
+          </a:xfrm>
+          <a:prstGeom prst="rect">
+            <a:avLst/>
+          </a:prstGeom>
+          <a:noFill/>
+        </p:spPr>
+        <p:txBody>
+          <a:bodyPr wrap="none" rtlCol="0">
+            <a:spAutoFit/>
+          </a:bodyPr>
+          <a:lstStyle/>
+          <a:p>
+            <a:r>
+              <a:rPr kumimoji="1" lang="en-US" altLang="ja-JP" sz="2400" b="1" dirty="0">
+                <a:solidFill>
+                  <a:srgbClr val="00B050"/>
+                </a:solidFill>
+              </a:rPr>
+              <a:t>Server</a:t>
+            </a:r>
+            <a:r>
+              <a:rPr kumimoji="1" lang="ja-JP" altLang="en-US" sz="2400" b="1" dirty="0">
+                <a:solidFill>
+                  <a:srgbClr val="00B050"/>
+                </a:solidFill>
+              </a:rPr>
+              <a:t>クラス</a:t>
+            </a:r>
+            <a:r>
+              <a:rPr kumimoji="1" lang="en-US" altLang="ja-JP" sz="2400" b="1" dirty="0">
+                <a:solidFill>
+                  <a:srgbClr val="FF0000"/>
+                </a:solidFill>
+              </a:rPr>
+              <a:t>(</a:t>
+            </a:r>
+            <a:r>
+              <a:rPr kumimoji="1" lang="en-US" altLang="ja-JP" sz="2400" b="1" dirty="0" err="1">
+                <a:solidFill>
+                  <a:srgbClr val="FF0000"/>
+                </a:solidFill>
+              </a:rPr>
+              <a:t>Server.h</a:t>
+            </a:r>
+            <a:r>
+              <a:rPr kumimoji="1" lang="en-US" altLang="ja-JP" sz="2400" b="1" dirty="0">
+                <a:solidFill>
+                  <a:srgbClr val="FF0000"/>
+                </a:solidFill>
+              </a:rPr>
+              <a:t>)</a:t>
+            </a:r>
+            <a:r>
+              <a:rPr kumimoji="1" lang="ja-JP" altLang="en-US" sz="2400" dirty="0"/>
+              <a:t>に受信したチャットデータ用のメンバ変数を追加します。</a:t>
+            </a:r>
+            <a:endParaRPr kumimoji="1" lang="en-US" altLang="ja-JP" sz="2400" dirty="0"/>
+          </a:p>
+        </p:txBody>
+      </p:sp>
+      <p:pic>
+        <p:nvPicPr>
+          <p:cNvPr id="3" name="図 2">
+            <a:extLst>
+              <a:ext uri="{FF2B5EF4-FFF2-40B4-BE49-F238E27FC236}">
+                <a16:creationId xmlns:a16="http://schemas.microsoft.com/office/drawing/2014/main" id="{396AE614-71E3-49C3-A211-7B2F3F8FCFC5}"/>
+              </a:ext>
+            </a:extLst>
+          </p:cNvPr>
+          <p:cNvPicPr>
+            <a:picLocks noChangeAspect="1"/>
+          </p:cNvPicPr>
+          <p:nvPr/>
+        </p:nvPicPr>
+        <p:blipFill>
+          <a:blip r:embed="rId2"/>
+          <a:stretch>
+            <a:fillRect/>
+          </a:stretch>
+        </p:blipFill>
+        <p:spPr>
+          <a:xfrm>
+            <a:off x="567542" y="1817793"/>
+            <a:ext cx="6625042" cy="1721273"/>
+          </a:xfrm>
+          <a:prstGeom prst="rect">
+            <a:avLst/>
+          </a:prstGeom>
+        </p:spPr>
+      </p:pic>
+      <p:sp>
+        <p:nvSpPr>
+          <p:cNvPr id="7" name="正方形/長方形 6">
+            <a:extLst>
+              <a:ext uri="{FF2B5EF4-FFF2-40B4-BE49-F238E27FC236}">
+                <a16:creationId xmlns:a16="http://schemas.microsoft.com/office/drawing/2014/main" id="{24D0C94B-8829-428D-A84D-4C88649CCEF2}"/>
+              </a:ext>
+            </a:extLst>
+          </p:cNvPr>
+          <p:cNvSpPr/>
+          <p:nvPr/>
+        </p:nvSpPr>
+        <p:spPr>
+          <a:xfrm>
+            <a:off x="2531534" y="2345266"/>
+            <a:ext cx="4661050" cy="618067"/>
+          </a:xfrm>
+          <a:prstGeom prst="rect">
+            <a:avLst/>
+          </a:prstGeom>
+          <a:noFill/>
+          <a:ln w="38100">
+            <a:solidFill>
+              <a:srgbClr val="FF0000"/>
+            </a:solidFill>
+          </a:ln>
+        </p:spPr>
+        <p:style>
+          <a:lnRef idx="2">
+            <a:schemeClr val="accent1">
+              <a:shade val="50000"/>
+            </a:schemeClr>
+          </a:lnRef>
+          <a:fillRef idx="1">
+            <a:schemeClr val="accent1"/>
+          </a:fillRef>
+          <a:effectRef idx="0">
+            <a:schemeClr val="accent1"/>
+          </a:effectRef>
+          <a:fontRef idx="minor">
+            <a:schemeClr val="lt1"/>
+          </a:fontRef>
+        </p:style>
+        <p:txBody>
+          <a:bodyPr rtlCol="0" anchor="ctr"/>
+          <a:lstStyle/>
+          <a:p>
+            <a:pPr algn="ctr"/>
+            <a:endParaRPr kumimoji="1" lang="ja-JP" altLang="en-US"/>
+          </a:p>
+        </p:txBody>
+      </p:sp>
+    </p:spTree>
+    <p:extLst>
+      <p:ext uri="{BB962C8B-B14F-4D97-AF65-F5344CB8AC3E}">
+        <p14:creationId xmlns:p14="http://schemas.microsoft.com/office/powerpoint/2010/main" val="1379912275"/>
+      </p:ext>
+    </p:extLst>
+  </p:cSld>
+  <p:clrMapOvr>
+    <a:masterClrMapping/>
+  </p:clrMapOvr>
+</p:sld>
+</file>
+
 <file path=ppt/slides/slide2.xml><?xml version="1.0" encoding="utf-8"?>
 <p:sld xmlns:a="http://schemas.openxmlformats.org/drawingml/2006/main" xmlns:r="http://schemas.openxmlformats.org/officeDocument/2006/relationships" xmlns:p="http://schemas.openxmlformats.org/presentationml/2006/main">
   <p:cSld>
@@ -4242,7 +4466,7 @@
         <p:spPr>
           <a:xfrm>
             <a:off x="567542" y="1216429"/>
-            <a:ext cx="9110186" cy="830997"/>
+            <a:ext cx="8972328" cy="830997"/>
           </a:xfrm>
           <a:prstGeom prst="rect">
             <a:avLst/>
@@ -4257,13 +4481,21 @@
           <a:p>
             <a:r>
               <a:rPr kumimoji="1" lang="ja-JP" altLang="en-US" sz="2400" dirty="0"/>
-              <a:t>データ通信をする際は、通信するデータを構造体にまとめます。</a:t>
+              <a:t>送信</a:t>
+            </a:r>
+            <a:r>
+              <a:rPr kumimoji="1" lang="en-US" altLang="ja-JP" sz="2400" dirty="0"/>
+              <a:t>/</a:t>
+            </a:r>
+            <a:r>
+              <a:rPr kumimoji="1" lang="ja-JP" altLang="en-US" sz="2400" dirty="0"/>
+              <a:t>受信するデータは同じでなければいけません。</a:t>
             </a:r>
             <a:endParaRPr kumimoji="1" lang="en-US" altLang="ja-JP" sz="2400" dirty="0"/>
           </a:p>
           <a:p>
             <a:r>
-              <a:rPr lang="en-US" altLang="ja-JP" sz="2400" b="1" dirty="0" err="1">
+              <a:rPr kumimoji="1" lang="en-US" altLang="ja-JP" sz="2400" b="1" dirty="0" err="1">
                 <a:solidFill>
                   <a:srgbClr val="FF0000"/>
                 </a:solidFill>
@@ -4272,7 +4504,7 @@
             </a:r>
             <a:r>
               <a:rPr lang="ja-JP" altLang="en-US" sz="2400" dirty="0"/>
-              <a:t>を確認してみましょう。</a:t>
+              <a:t>で送受信用のデータを用意します。</a:t>
             </a:r>
             <a:endParaRPr kumimoji="1" lang="en-US" altLang="ja-JP" sz="2400" dirty="0"/>
           </a:p>
@@ -4283,7 +4515,7 @@
           <p:cNvPr id="5" name="図 4">
             <a:extLst>
               <a:ext uri="{FF2B5EF4-FFF2-40B4-BE49-F238E27FC236}">
-                <a16:creationId xmlns:a16="http://schemas.microsoft.com/office/drawing/2014/main" id="{D2FE3AA8-31BB-42AA-906E-503410FA2601}"/>
+                <a16:creationId xmlns:a16="http://schemas.microsoft.com/office/drawing/2014/main" id="{3F671132-E53D-4471-B17E-1CF66C4E123F}"/>
               </a:ext>
             </a:extLst>
           </p:cNvPr>
@@ -4300,8 +4532,8 @@
         </p:blipFill>
         <p:spPr>
           <a:xfrm>
-            <a:off x="567541" y="2187126"/>
-            <a:ext cx="8889251" cy="3240007"/>
+            <a:off x="567542" y="2187126"/>
+            <a:ext cx="8002932" cy="2994474"/>
           </a:xfrm>
           <a:prstGeom prst="rect">
             <a:avLst/>
@@ -4311,7 +4543,7 @@
     </p:spTree>
     <p:extLst>
       <p:ext uri="{BB962C8B-B14F-4D97-AF65-F5344CB8AC3E}">
-        <p14:creationId xmlns:p14="http://schemas.microsoft.com/office/powerpoint/2010/main" val="1291432162"/>
+        <p14:creationId xmlns:p14="http://schemas.microsoft.com/office/powerpoint/2010/main" val="2826799085"/>
       </p:ext>
     </p:extLst>
   </p:cSld>
@@ -4388,7 +4620,7 @@
         <p:spPr>
           <a:xfrm>
             <a:off x="567542" y="1216429"/>
-            <a:ext cx="9110186" cy="1200329"/>
+            <a:ext cx="10176184" cy="461665"/>
           </a:xfrm>
           <a:prstGeom prst="rect">
             <a:avLst/>
@@ -4404,28 +4636,46 @@
             <a:r>
               <a:rPr kumimoji="1" lang="en-US" altLang="ja-JP" sz="2400" b="1" dirty="0">
                 <a:solidFill>
+                  <a:srgbClr val="00B050"/>
+                </a:solidFill>
+              </a:rPr>
+              <a:t>Client</a:t>
+            </a:r>
+            <a:r>
+              <a:rPr kumimoji="1" lang="ja-JP" altLang="en-US" sz="2400" b="1" dirty="0">
+                <a:solidFill>
+                  <a:srgbClr val="00B050"/>
+                </a:solidFill>
+              </a:rPr>
+              <a:t>クラス</a:t>
+            </a:r>
+            <a:r>
+              <a:rPr kumimoji="1" lang="en-US" altLang="ja-JP" sz="2400" b="1" dirty="0">
+                <a:solidFill>
                   <a:srgbClr val="FF0000"/>
                 </a:solidFill>
               </a:rPr>
-              <a:t>Client.cpp</a:t>
+              <a:t>(</a:t>
+            </a:r>
+            <a:r>
+              <a:rPr kumimoji="1" lang="en-US" altLang="ja-JP" sz="2400" b="1" dirty="0" err="1">
+                <a:solidFill>
+                  <a:srgbClr val="FF0000"/>
+                </a:solidFill>
+              </a:rPr>
+              <a:t>Client.h</a:t>
+            </a:r>
+            <a:r>
+              <a:rPr kumimoji="1" lang="en-US" altLang="ja-JP" sz="2400" b="1" dirty="0">
+                <a:solidFill>
+                  <a:srgbClr val="FF0000"/>
+                </a:solidFill>
+              </a:rPr>
+              <a:t>)</a:t>
             </a:r>
             <a:r>
               <a:rPr kumimoji="1" lang="ja-JP" altLang="en-US" sz="2400" dirty="0"/>
-              <a:t>に送信処理を書きます。</a:t>
-            </a:r>
-            <a:endParaRPr kumimoji="1" lang="en-US" altLang="ja-JP" sz="2400" dirty="0"/>
-          </a:p>
-          <a:p>
-            <a:r>
-              <a:rPr kumimoji="1" lang="ja-JP" altLang="en-US" sz="2400" dirty="0"/>
-              <a:t>名前入力、接続、メッセージ入力まではすでに完成しています。</a:t>
-            </a:r>
-            <a:endParaRPr kumimoji="1" lang="en-US" altLang="ja-JP" sz="2400" dirty="0"/>
-          </a:p>
-          <a:p>
-            <a:r>
-              <a:rPr lang="ja-JP" altLang="en-US" sz="2400" dirty="0"/>
-              <a:t>流れを確認してみましょう。</a:t>
+              <a:t>に送信用データのメンバ変数を追加しましょう。</a:t>
             </a:r>
             <a:endParaRPr kumimoji="1" lang="en-US" altLang="ja-JP" sz="2400" dirty="0"/>
           </a:p>
@@ -4436,7 +4686,7 @@
           <p:cNvPr id="3" name="図 2">
             <a:extLst>
               <a:ext uri="{FF2B5EF4-FFF2-40B4-BE49-F238E27FC236}">
-                <a16:creationId xmlns:a16="http://schemas.microsoft.com/office/drawing/2014/main" id="{D607B163-FDE5-4DAA-A390-D5C3706553B0}"/>
+                <a16:creationId xmlns:a16="http://schemas.microsoft.com/office/drawing/2014/main" id="{BAE81295-4D95-4CEF-8CCF-FAC9224B30E8}"/>
               </a:ext>
             </a:extLst>
           </p:cNvPr>
@@ -4453,18 +4703,70 @@
         </p:blipFill>
         <p:spPr>
           <a:xfrm>
-            <a:off x="567542" y="2556458"/>
-            <a:ext cx="7297991" cy="3922670"/>
+            <a:off x="567542" y="1817794"/>
+            <a:ext cx="5834520" cy="1611206"/>
           </a:xfrm>
           <a:prstGeom prst="rect">
             <a:avLst/>
           </a:prstGeom>
         </p:spPr>
       </p:pic>
+      <p:sp>
+        <p:nvSpPr>
+          <p:cNvPr id="7" name="正方形/長方形 6">
+            <a:extLst>
+              <a:ext uri="{FF2B5EF4-FFF2-40B4-BE49-F238E27FC236}">
+                <a16:creationId xmlns:a16="http://schemas.microsoft.com/office/drawing/2014/main" id="{7E373005-43C4-434C-B4FD-8A53F1DAA9F7}"/>
+              </a:ext>
+            </a:extLst>
+          </p:cNvPr>
+          <p:cNvSpPr/>
+          <p:nvPr/>
+        </p:nvSpPr>
+        <p:spPr>
+          <a:xfrm>
+            <a:off x="2387599" y="2330027"/>
+            <a:ext cx="3437468" cy="734906"/>
+          </a:xfrm>
+          <a:prstGeom prst="rect">
+            <a:avLst/>
+          </a:prstGeom>
+          <a:noFill/>
+          <a:ln w="38100">
+            <a:solidFill>
+              <a:srgbClr val="FF0000"/>
+            </a:solidFill>
+          </a:ln>
+        </p:spPr>
+        <p:style>
+          <a:lnRef idx="2">
+            <a:schemeClr val="accent1">
+              <a:shade val="50000"/>
+            </a:schemeClr>
+          </a:lnRef>
+          <a:fillRef idx="1">
+            <a:schemeClr val="accent1"/>
+          </a:fillRef>
+          <a:effectRef idx="0">
+            <a:schemeClr val="accent1"/>
+          </a:effectRef>
+          <a:fontRef idx="minor">
+            <a:schemeClr val="lt1"/>
+          </a:fontRef>
+        </p:style>
+        <p:txBody>
+          <a:bodyPr rtlCol="0" anchor="ctr"/>
+          <a:lstStyle/>
+          <a:p>
+            <a:pPr algn="ctr"/>
+            <a:endParaRPr kumimoji="1" lang="ja-JP" altLang="en-US"/>
+          </a:p>
+        </p:txBody>
+      </p:sp>
     </p:spTree>
     <p:extLst>
       <p:ext uri="{BB962C8B-B14F-4D97-AF65-F5344CB8AC3E}">
-        <p14:creationId xmlns:p14="http://schemas.microsoft.com/office/powerpoint/2010/main" val="1599751781"/>
+        <p14:creationId xmlns:p14="http://schemas.microsoft.com/office/powerpoint/2010/main" val="39774589"/>
       </p:ext>
     </p:extLst>
   </p:cSld>
@@ -4541,7 +4843,7 @@
         <p:spPr>
           <a:xfrm>
             <a:off x="567542" y="1216429"/>
-            <a:ext cx="8586005" cy="830997"/>
+            <a:ext cx="7571303" cy="830997"/>
           </a:xfrm>
           <a:prstGeom prst="rect">
             <a:avLst/>
@@ -4556,44 +4858,40 @@
           <a:p>
             <a:r>
               <a:rPr kumimoji="1" lang="ja-JP" altLang="en-US" sz="2400" dirty="0"/>
-              <a:t>データの送信は</a:t>
-            </a:r>
-            <a:r>
-              <a:rPr kumimoji="1" lang="en-US" altLang="ja-JP" sz="2400" dirty="0" err="1"/>
-              <a:t>DxLib</a:t>
-            </a:r>
-            <a:r>
-              <a:rPr kumimoji="1" lang="ja-JP" altLang="en-US" sz="2400" dirty="0"/>
-              <a:t>の</a:t>
-            </a:r>
-            <a:r>
-              <a:rPr kumimoji="1" lang="en-US" altLang="ja-JP" sz="2400" b="1" dirty="0" err="1">
+              <a:t>コンストラクタで初期化、名前入力の対応をします。</a:t>
+            </a:r>
+            <a:endParaRPr kumimoji="1" lang="en-US" altLang="ja-JP" sz="2400" dirty="0"/>
+          </a:p>
+          <a:p>
+            <a:r>
+              <a:rPr lang="ja-JP" altLang="en-US" sz="2400" b="1" dirty="0">
                 <a:solidFill>
-                  <a:srgbClr val="0070C0"/>
+                  <a:srgbClr val="FF0000"/>
                 </a:solidFill>
               </a:rPr>
-              <a:t>NetWorkSend</a:t>
-            </a:r>
-            <a:r>
-              <a:rPr kumimoji="1" lang="ja-JP" altLang="en-US" sz="2400" b="1" dirty="0">
+              <a:t>（</a:t>
+            </a:r>
+            <a:r>
+              <a:rPr lang="en-US" altLang="ja-JP" sz="2400" b="1" dirty="0">
                 <a:solidFill>
-                  <a:srgbClr val="0070C0"/>
+                  <a:srgbClr val="FF0000"/>
                 </a:solidFill>
               </a:rPr>
-              <a:t>関数</a:t>
-            </a:r>
-            <a:r>
-              <a:rPr kumimoji="1" lang="ja-JP" altLang="en-US" sz="2400" dirty="0"/>
-              <a:t>を呼ぶだけです。</a:t>
-            </a:r>
-            <a:endParaRPr kumimoji="1" lang="en-US" altLang="ja-JP" sz="2400" dirty="0"/>
-          </a:p>
-          <a:p>
-            <a:r>
-              <a:rPr lang="ja-JP" altLang="en-US" sz="2400" dirty="0"/>
-              <a:t>以下の部分に追記しましょう。</a:t>
-            </a:r>
-            <a:endParaRPr kumimoji="1" lang="en-US" altLang="ja-JP" sz="2400" dirty="0"/>
+              <a:t>Client.cpp</a:t>
+            </a:r>
+            <a:r>
+              <a:rPr lang="ja-JP" altLang="en-US" sz="2400" b="1" dirty="0">
+                <a:solidFill>
+                  <a:srgbClr val="FF0000"/>
+                </a:solidFill>
+              </a:rPr>
+              <a:t>）</a:t>
+            </a:r>
+            <a:endParaRPr kumimoji="1" lang="en-US" altLang="ja-JP" sz="2400" b="1" dirty="0">
+              <a:solidFill>
+                <a:srgbClr val="FF0000"/>
+              </a:solidFill>
+            </a:endParaRPr>
           </a:p>
         </p:txBody>
       </p:sp>
@@ -4602,7 +4900,7 @@
           <p:cNvPr id="5" name="図 4">
             <a:extLst>
               <a:ext uri="{FF2B5EF4-FFF2-40B4-BE49-F238E27FC236}">
-                <a16:creationId xmlns:a16="http://schemas.microsoft.com/office/drawing/2014/main" id="{F4249D99-D213-4FD3-90FF-9A22B027FDB0}"/>
+                <a16:creationId xmlns:a16="http://schemas.microsoft.com/office/drawing/2014/main" id="{530D380A-C8D7-4B6A-9D45-51A8CED64540}"/>
               </a:ext>
             </a:extLst>
           </p:cNvPr>
@@ -4619,20 +4917,50 @@
         </p:blipFill>
         <p:spPr>
           <a:xfrm>
-            <a:off x="567541" y="2187126"/>
-            <a:ext cx="9921873" cy="3454445"/>
+            <a:off x="567542" y="2187126"/>
+            <a:ext cx="4791744" cy="1924319"/>
           </a:xfrm>
           <a:prstGeom prst="rect">
             <a:avLst/>
           </a:prstGeom>
         </p:spPr>
       </p:pic>
-      <p:sp>
-        <p:nvSpPr>
-          <p:cNvPr id="7" name="正方形/長方形 6">
-            <a:extLst>
-              <a:ext uri="{FF2B5EF4-FFF2-40B4-BE49-F238E27FC236}">
-                <a16:creationId xmlns:a16="http://schemas.microsoft.com/office/drawing/2014/main" id="{3D13C357-689F-46D0-8280-28D636095CDA}"/>
+      <p:pic>
+        <p:nvPicPr>
+          <p:cNvPr id="11" name="図 10">
+            <a:extLst>
+              <a:ext uri="{FF2B5EF4-FFF2-40B4-BE49-F238E27FC236}">
+                <a16:creationId xmlns:a16="http://schemas.microsoft.com/office/drawing/2014/main" id="{F65D9B07-E159-46C6-B122-10D612E3ED4E}"/>
+              </a:ext>
+            </a:extLst>
+          </p:cNvPr>
+          <p:cNvPicPr>
+            <a:picLocks noChangeAspect="1"/>
+          </p:cNvPicPr>
+          <p:nvPr/>
+        </p:nvPicPr>
+        <p:blipFill>
+          <a:blip r:embed="rId3"/>
+          <a:stretch>
+            <a:fillRect/>
+          </a:stretch>
+        </p:blipFill>
+        <p:spPr>
+          <a:xfrm>
+            <a:off x="567542" y="4429459"/>
+            <a:ext cx="6908525" cy="2236683"/>
+          </a:xfrm>
+          <a:prstGeom prst="rect">
+            <a:avLst/>
+          </a:prstGeom>
+        </p:spPr>
+      </p:pic>
+      <p:sp>
+        <p:nvSpPr>
+          <p:cNvPr id="12" name="正方形/長方形 11">
+            <a:extLst>
+              <a:ext uri="{FF2B5EF4-FFF2-40B4-BE49-F238E27FC236}">
+                <a16:creationId xmlns:a16="http://schemas.microsoft.com/office/drawing/2014/main" id="{0A7A083A-13D8-4F13-A630-55BFF3956F9E}"/>
               </a:ext>
             </a:extLst>
           </p:cNvPr>
@@ -4641,8 +4969,8 @@
         </p:nvSpPr>
         <p:spPr>
           <a:xfrm>
-            <a:off x="3293533" y="4174067"/>
-            <a:ext cx="7120467" cy="254000"/>
+            <a:off x="1906055" y="3208867"/>
+            <a:ext cx="1853145" cy="313266"/>
           </a:xfrm>
           <a:prstGeom prst="rect">
             <a:avLst/>
@@ -4679,10 +5007,62 @@
           </a:p>
         </p:txBody>
       </p:sp>
+      <p:sp>
+        <p:nvSpPr>
+          <p:cNvPr id="13" name="正方形/長方形 12">
+            <a:extLst>
+              <a:ext uri="{FF2B5EF4-FFF2-40B4-BE49-F238E27FC236}">
+                <a16:creationId xmlns:a16="http://schemas.microsoft.com/office/drawing/2014/main" id="{9C711D6E-0B20-43B6-8896-758EDF16FE0E}"/>
+              </a:ext>
+            </a:extLst>
+          </p:cNvPr>
+          <p:cNvSpPr/>
+          <p:nvPr/>
+        </p:nvSpPr>
+        <p:spPr>
+          <a:xfrm>
+            <a:off x="2430988" y="4976553"/>
+            <a:ext cx="5163612" cy="577580"/>
+          </a:xfrm>
+          <a:prstGeom prst="rect">
+            <a:avLst/>
+          </a:prstGeom>
+          <a:noFill/>
+          <a:ln w="38100">
+            <a:solidFill>
+              <a:srgbClr val="FF0000"/>
+            </a:solidFill>
+          </a:ln>
+        </p:spPr>
+        <p:style>
+          <a:lnRef idx="2">
+            <a:schemeClr val="accent1">
+              <a:shade val="50000"/>
+            </a:schemeClr>
+          </a:lnRef>
+          <a:fillRef idx="1">
+            <a:schemeClr val="accent1"/>
+          </a:fillRef>
+          <a:effectRef idx="0">
+            <a:schemeClr val="accent1"/>
+          </a:effectRef>
+          <a:fontRef idx="minor">
+            <a:schemeClr val="lt1"/>
+          </a:fontRef>
+        </p:style>
+        <p:txBody>
+          <a:bodyPr rtlCol="0" anchor="ctr"/>
+          <a:lstStyle/>
+          <a:p>
+            <a:pPr algn="ctr"/>
+            <a:endParaRPr kumimoji="1" lang="ja-JP" altLang="en-US"/>
+          </a:p>
+        </p:txBody>
+      </p:sp>
     </p:spTree>
     <p:extLst>
       <p:ext uri="{BB962C8B-B14F-4D97-AF65-F5344CB8AC3E}">
-        <p14:creationId xmlns:p14="http://schemas.microsoft.com/office/powerpoint/2010/main" val="2495280185"/>
+        <p14:creationId xmlns:p14="http://schemas.microsoft.com/office/powerpoint/2010/main" val="2002100362"/>
       </p:ext>
     </p:extLst>
   </p:cSld>
@@ -4759,7 +5139,7 @@
         <p:spPr>
           <a:xfrm>
             <a:off x="567542" y="1216429"/>
-            <a:ext cx="6340197" cy="830997"/>
+            <a:ext cx="6955750" cy="830997"/>
           </a:xfrm>
           <a:prstGeom prst="rect">
             <a:avLst/>
@@ -4773,29 +5153,41 @@
           <a:lstStyle/>
           <a:p>
             <a:r>
-              <a:rPr kumimoji="1" lang="ja-JP" altLang="en-US" sz="2400" dirty="0"/>
-              <a:t>サーバー側に</a:t>
-            </a:r>
-            <a:r>
-              <a:rPr kumimoji="1" lang="ja-JP" altLang="en-US" sz="2400" b="1" dirty="0">
+              <a:rPr lang="ja-JP" altLang="en-US" sz="2400" dirty="0"/>
+              <a:t>メッセージ入力対応後にサーバーに送信します。</a:t>
+            </a:r>
+            <a:endParaRPr kumimoji="1" lang="en-US" altLang="ja-JP" sz="2400" dirty="0"/>
+          </a:p>
+          <a:p>
+            <a:r>
+              <a:rPr lang="ja-JP" altLang="en-US" sz="2400" b="1" dirty="0">
                 <a:solidFill>
                   <a:srgbClr val="FF0000"/>
                 </a:solidFill>
               </a:rPr>
-              <a:t>受信処理</a:t>
-            </a:r>
-            <a:r>
-              <a:rPr kumimoji="1" lang="ja-JP" altLang="en-US" sz="2400" dirty="0"/>
-              <a:t>を実装します。</a:t>
-            </a:r>
-            <a:endParaRPr kumimoji="1" lang="en-US" altLang="ja-JP" sz="2400" dirty="0"/>
-          </a:p>
-          <a:p>
-            <a:r>
-              <a:rPr lang="ja-JP" altLang="en-US" sz="2400" dirty="0"/>
-              <a:t>サーバー側のプロジェクトを開きましょう。</a:t>
-            </a:r>
-            <a:endParaRPr kumimoji="1" lang="en-US" altLang="ja-JP" sz="2400" dirty="0"/>
+              <a:t>（</a:t>
+            </a:r>
+            <a:r>
+              <a:rPr lang="en-US" altLang="ja-JP" sz="2400" b="1" dirty="0">
+                <a:solidFill>
+                  <a:srgbClr val="FF0000"/>
+                </a:solidFill>
+              </a:rPr>
+              <a:t>Client.cpp</a:t>
+            </a:r>
+            <a:r>
+              <a:rPr lang="ja-JP" altLang="en-US" sz="2400" b="1" dirty="0">
+                <a:solidFill>
+                  <a:srgbClr val="FF0000"/>
+                </a:solidFill>
+              </a:rPr>
+              <a:t>）</a:t>
+            </a:r>
+            <a:endParaRPr kumimoji="1" lang="en-US" altLang="ja-JP" sz="2400" b="1" dirty="0">
+              <a:solidFill>
+                <a:srgbClr val="FF0000"/>
+              </a:solidFill>
+            </a:endParaRPr>
           </a:p>
         </p:txBody>
       </p:sp>
@@ -4804,7 +5196,7 @@
           <p:cNvPr id="3" name="図 2">
             <a:extLst>
               <a:ext uri="{FF2B5EF4-FFF2-40B4-BE49-F238E27FC236}">
-                <a16:creationId xmlns:a16="http://schemas.microsoft.com/office/drawing/2014/main" id="{3AAF801C-DC2D-4431-BFE1-F764B770456C}"/>
+                <a16:creationId xmlns:a16="http://schemas.microsoft.com/office/drawing/2014/main" id="{84001528-1C0E-4322-B877-A05E39C2AA47}"/>
               </a:ext>
             </a:extLst>
           </p:cNvPr>
@@ -4821,18 +5213,70 @@
         </p:blipFill>
         <p:spPr>
           <a:xfrm>
-            <a:off x="567542" y="2187126"/>
-            <a:ext cx="7882191" cy="4236678"/>
+            <a:off x="567542" y="2306291"/>
+            <a:ext cx="10473067" cy="3197042"/>
           </a:xfrm>
           <a:prstGeom prst="rect">
             <a:avLst/>
           </a:prstGeom>
         </p:spPr>
       </p:pic>
+      <p:sp>
+        <p:nvSpPr>
+          <p:cNvPr id="10" name="正方形/長方形 9">
+            <a:extLst>
+              <a:ext uri="{FF2B5EF4-FFF2-40B4-BE49-F238E27FC236}">
+                <a16:creationId xmlns:a16="http://schemas.microsoft.com/office/drawing/2014/main" id="{06CAD91F-A484-489D-87EC-8FAF249F68E2}"/>
+              </a:ext>
+            </a:extLst>
+          </p:cNvPr>
+          <p:cNvSpPr/>
+          <p:nvPr/>
+        </p:nvSpPr>
+        <p:spPr>
+          <a:xfrm>
+            <a:off x="3345389" y="3177093"/>
+            <a:ext cx="7695220" cy="1428773"/>
+          </a:xfrm>
+          <a:prstGeom prst="rect">
+            <a:avLst/>
+          </a:prstGeom>
+          <a:noFill/>
+          <a:ln w="38100">
+            <a:solidFill>
+              <a:srgbClr val="FF0000"/>
+            </a:solidFill>
+          </a:ln>
+        </p:spPr>
+        <p:style>
+          <a:lnRef idx="2">
+            <a:schemeClr val="accent1">
+              <a:shade val="50000"/>
+            </a:schemeClr>
+          </a:lnRef>
+          <a:fillRef idx="1">
+            <a:schemeClr val="accent1"/>
+          </a:fillRef>
+          <a:effectRef idx="0">
+            <a:schemeClr val="accent1"/>
+          </a:effectRef>
+          <a:fontRef idx="minor">
+            <a:schemeClr val="lt1"/>
+          </a:fontRef>
+        </p:style>
+        <p:txBody>
+          <a:bodyPr rtlCol="0" anchor="ctr"/>
+          <a:lstStyle/>
+          <a:p>
+            <a:pPr algn="ctr"/>
+            <a:endParaRPr kumimoji="1" lang="ja-JP" altLang="en-US"/>
+          </a:p>
+        </p:txBody>
+      </p:sp>
     </p:spTree>
     <p:extLst>
       <p:ext uri="{BB962C8B-B14F-4D97-AF65-F5344CB8AC3E}">
-        <p14:creationId xmlns:p14="http://schemas.microsoft.com/office/powerpoint/2010/main" val="1209006027"/>
+        <p14:creationId xmlns:p14="http://schemas.microsoft.com/office/powerpoint/2010/main" val="3942738381"/>
       </p:ext>
     </p:extLst>
   </p:cSld>
@@ -4909,7 +5353,7 @@
         <p:spPr>
           <a:xfrm>
             <a:off x="567542" y="1216429"/>
-            <a:ext cx="2970685" cy="461665"/>
+            <a:ext cx="8653331" cy="3416320"/>
           </a:xfrm>
           <a:prstGeom prst="rect">
             <a:avLst/>
@@ -4923,107 +5367,180 @@
           <a:lstStyle/>
           <a:p>
             <a:r>
-              <a:rPr kumimoji="1" lang="en-US" altLang="ja-JP" sz="2400" b="1" dirty="0" err="1">
+              <a:rPr lang="ja-JP" altLang="en-US" sz="2400" dirty="0"/>
+              <a:t>データ送信には</a:t>
+            </a:r>
+            <a:r>
+              <a:rPr lang="en-US" altLang="ja-JP" sz="2400" b="1" dirty="0" err="1">
+                <a:solidFill>
+                  <a:srgbClr val="0070C0"/>
+                </a:solidFill>
+              </a:rPr>
+              <a:t>NetWorkSend</a:t>
+            </a:r>
+            <a:r>
+              <a:rPr lang="ja-JP" altLang="en-US" sz="2400" b="1" dirty="0">
+                <a:solidFill>
+                  <a:srgbClr val="0070C0"/>
+                </a:solidFill>
+              </a:rPr>
+              <a:t>関数</a:t>
+            </a:r>
+            <a:r>
+              <a:rPr lang="ja-JP" altLang="en-US" sz="2400" dirty="0"/>
+              <a:t>を使用します。</a:t>
+            </a:r>
+            <a:endParaRPr lang="en-US" altLang="ja-JP" sz="2400" dirty="0"/>
+          </a:p>
+          <a:p>
+            <a:endParaRPr kumimoji="1" lang="en-US" altLang="ja-JP" sz="2400" b="1" dirty="0">
+              <a:solidFill>
+                <a:srgbClr val="FF0000"/>
+              </a:solidFill>
+            </a:endParaRPr>
+          </a:p>
+          <a:p>
+            <a:r>
+              <a:rPr kumimoji="1" lang="en-US" altLang="ja-JP" sz="2400" dirty="0">
+                <a:solidFill>
+                  <a:srgbClr val="0070C0"/>
+                </a:solidFill>
+              </a:rPr>
+              <a:t>int</a:t>
+            </a:r>
+            <a:r>
+              <a:rPr kumimoji="1" lang="en-US" altLang="ja-JP" sz="2400" b="1" dirty="0">
                 <a:solidFill>
                   <a:srgbClr val="FF0000"/>
                 </a:solidFill>
               </a:rPr>
-              <a:t>Server.h</a:t>
+              <a:t> </a:t>
+            </a:r>
+            <a:r>
+              <a:rPr kumimoji="1" lang="en-US" altLang="ja-JP" sz="2400" dirty="0" err="1"/>
+              <a:t>NetWorkSend</a:t>
+            </a:r>
+            <a:r>
+              <a:rPr kumimoji="1" lang="en-US" altLang="ja-JP" sz="2400" dirty="0"/>
+              <a:t>( </a:t>
+            </a:r>
+            <a:r>
+              <a:rPr kumimoji="1" lang="en-US" altLang="ja-JP" sz="2400" dirty="0">
+                <a:solidFill>
+                  <a:srgbClr val="0070C0"/>
+                </a:solidFill>
+              </a:rPr>
+              <a:t>int</a:t>
+            </a:r>
+            <a:r>
+              <a:rPr kumimoji="1" lang="en-US" altLang="ja-JP" sz="2400" dirty="0"/>
+              <a:t> </a:t>
+            </a:r>
+            <a:r>
+              <a:rPr kumimoji="1" lang="en-US" altLang="ja-JP" sz="2400" dirty="0" err="1"/>
+              <a:t>NetHandle</a:t>
+            </a:r>
+            <a:r>
+              <a:rPr kumimoji="1" lang="en-US" altLang="ja-JP" sz="2400" dirty="0"/>
+              <a:t>, </a:t>
+            </a:r>
+            <a:r>
+              <a:rPr kumimoji="1" lang="en-US" altLang="ja-JP" sz="2400" dirty="0">
+                <a:solidFill>
+                  <a:srgbClr val="0070C0"/>
+                </a:solidFill>
+              </a:rPr>
+              <a:t>void</a:t>
+            </a:r>
+            <a:r>
+              <a:rPr kumimoji="1" lang="en-US" altLang="ja-JP" sz="2400" dirty="0"/>
+              <a:t> *Buffer, </a:t>
+            </a:r>
+            <a:r>
+              <a:rPr kumimoji="1" lang="en-US" altLang="ja-JP" sz="2400" dirty="0">
+                <a:solidFill>
+                  <a:srgbClr val="0070C0"/>
+                </a:solidFill>
+              </a:rPr>
+              <a:t>int</a:t>
+            </a:r>
+            <a:r>
+              <a:rPr kumimoji="1" lang="en-US" altLang="ja-JP" sz="2400" dirty="0"/>
+              <a:t> Length ) ;</a:t>
+            </a:r>
+          </a:p>
+          <a:p>
+            <a:endParaRPr kumimoji="1" lang="en-US" altLang="ja-JP" sz="2400" b="1" dirty="0">
+              <a:solidFill>
+                <a:srgbClr val="FF0000"/>
+              </a:solidFill>
+            </a:endParaRPr>
+          </a:p>
+          <a:p>
+            <a:r>
+              <a:rPr kumimoji="1" lang="en-US" altLang="ja-JP" sz="2400" dirty="0" err="1"/>
+              <a:t>NetHandle</a:t>
+            </a:r>
+            <a:r>
+              <a:rPr kumimoji="1" lang="en-US" altLang="ja-JP" sz="2400" dirty="0"/>
+              <a:t>	</a:t>
             </a:r>
             <a:r>
               <a:rPr kumimoji="1" lang="ja-JP" altLang="en-US" sz="2400" dirty="0"/>
-              <a:t>を書きます</a:t>
+              <a:t>・・・送信先ハンドル</a:t>
             </a:r>
             <a:endParaRPr kumimoji="1" lang="en-US" altLang="ja-JP" sz="2400" dirty="0"/>
           </a:p>
-        </p:txBody>
-      </p:sp>
-      <p:pic>
-        <p:nvPicPr>
-          <p:cNvPr id="5" name="図 4">
-            <a:extLst>
-              <a:ext uri="{FF2B5EF4-FFF2-40B4-BE49-F238E27FC236}">
-                <a16:creationId xmlns:a16="http://schemas.microsoft.com/office/drawing/2014/main" id="{FA2F6B49-84A1-4381-9605-D437B1B54A43}"/>
-              </a:ext>
-            </a:extLst>
-          </p:cNvPr>
-          <p:cNvPicPr>
-            <a:picLocks noChangeAspect="1"/>
-          </p:cNvPicPr>
-          <p:nvPr/>
-        </p:nvPicPr>
-        <p:blipFill>
-          <a:blip r:embed="rId2"/>
-          <a:stretch>
-            <a:fillRect/>
-          </a:stretch>
-        </p:blipFill>
-        <p:spPr>
-          <a:xfrm>
-            <a:off x="567541" y="1817794"/>
-            <a:ext cx="11151237" cy="1611206"/>
-          </a:xfrm>
-          <a:prstGeom prst="rect">
-            <a:avLst/>
-          </a:prstGeom>
-        </p:spPr>
-      </p:pic>
-      <p:sp>
-        <p:nvSpPr>
-          <p:cNvPr id="7" name="正方形/長方形 6">
-            <a:extLst>
-              <a:ext uri="{FF2B5EF4-FFF2-40B4-BE49-F238E27FC236}">
-                <a16:creationId xmlns:a16="http://schemas.microsoft.com/office/drawing/2014/main" id="{20F529A1-F0FD-4A12-B18A-F64572616388}"/>
-              </a:ext>
-            </a:extLst>
-          </p:cNvPr>
-          <p:cNvSpPr/>
-          <p:nvPr/>
-        </p:nvSpPr>
-        <p:spPr>
-          <a:xfrm>
-            <a:off x="2827867" y="2768600"/>
-            <a:ext cx="7408333" cy="321733"/>
-          </a:xfrm>
-          <a:prstGeom prst="rect">
-            <a:avLst/>
-          </a:prstGeom>
-          <a:noFill/>
-          <a:ln w="38100">
-            <a:solidFill>
-              <a:srgbClr val="FF0000"/>
-            </a:solidFill>
-          </a:ln>
-        </p:spPr>
-        <p:style>
-          <a:lnRef idx="2">
-            <a:schemeClr val="accent1">
-              <a:shade val="50000"/>
-            </a:schemeClr>
-          </a:lnRef>
-          <a:fillRef idx="1">
-            <a:schemeClr val="accent1"/>
-          </a:fillRef>
-          <a:effectRef idx="0">
-            <a:schemeClr val="accent1"/>
-          </a:effectRef>
-          <a:fontRef idx="minor">
-            <a:schemeClr val="lt1"/>
-          </a:fontRef>
-        </p:style>
-        <p:txBody>
-          <a:bodyPr rtlCol="0" anchor="ctr"/>
-          <a:lstStyle/>
-          <a:p>
-            <a:pPr algn="ctr"/>
-            <a:endParaRPr kumimoji="1" lang="ja-JP" altLang="en-US"/>
+          <a:p>
+            <a:r>
+              <a:rPr kumimoji="1" lang="en-US" altLang="ja-JP" sz="2400" dirty="0"/>
+              <a:t>Buffer		</a:t>
+            </a:r>
+            <a:r>
+              <a:rPr kumimoji="1" lang="ja-JP" altLang="en-US" sz="2400" dirty="0"/>
+              <a:t>・・・送信データ</a:t>
+            </a:r>
+            <a:endParaRPr kumimoji="1" lang="en-US" altLang="ja-JP" sz="2400" dirty="0"/>
+          </a:p>
+          <a:p>
+            <a:r>
+              <a:rPr kumimoji="1" lang="en-US" altLang="ja-JP" sz="2400" dirty="0"/>
+              <a:t>Length	</a:t>
+            </a:r>
+            <a:r>
+              <a:rPr kumimoji="1" lang="ja-JP" altLang="en-US" sz="2400" dirty="0"/>
+              <a:t>・・・送信データの長さ</a:t>
+            </a:r>
+            <a:endParaRPr kumimoji="1" lang="en-US" altLang="ja-JP" sz="2400" dirty="0"/>
+          </a:p>
+          <a:p>
+            <a:endParaRPr lang="en-US" altLang="ja-JP" sz="2400" b="1" dirty="0">
+              <a:solidFill>
+                <a:srgbClr val="FF0000"/>
+              </a:solidFill>
+            </a:endParaRPr>
+          </a:p>
+          <a:p>
+            <a:r>
+              <a:rPr kumimoji="1" lang="ja-JP" altLang="en-US" sz="2400" b="1" dirty="0">
+                <a:solidFill>
+                  <a:srgbClr val="FF0000"/>
+                </a:solidFill>
+              </a:rPr>
+              <a:t>接続中の端末に向けて第２引数のデータを送信します。</a:t>
+            </a:r>
+            <a:endParaRPr kumimoji="1" lang="en-US" altLang="ja-JP" sz="2400" b="1" dirty="0">
+              <a:solidFill>
+                <a:srgbClr val="FF0000"/>
+              </a:solidFill>
+            </a:endParaRPr>
           </a:p>
         </p:txBody>
       </p:sp>
     </p:spTree>
     <p:extLst>
       <p:ext uri="{BB962C8B-B14F-4D97-AF65-F5344CB8AC3E}">
-        <p14:creationId xmlns:p14="http://schemas.microsoft.com/office/powerpoint/2010/main" val="4097201240"/>
+        <p14:creationId xmlns:p14="http://schemas.microsoft.com/office/powerpoint/2010/main" val="3678466290"/>
       </p:ext>
     </p:extLst>
   </p:cSld>
@@ -5100,7 +5617,7 @@
         <p:spPr>
           <a:xfrm>
             <a:off x="567542" y="1216429"/>
-            <a:ext cx="3328155" cy="461665"/>
+            <a:ext cx="6694461" cy="461665"/>
           </a:xfrm>
           <a:prstGeom prst="rect">
             <a:avLst/>
@@ -5114,16 +5631,28 @@
           <a:lstStyle/>
           <a:p>
             <a:r>
-              <a:rPr kumimoji="1" lang="en-US" altLang="ja-JP" sz="2400" b="1" dirty="0">
+              <a:rPr lang="ja-JP" altLang="en-US" sz="2400" dirty="0"/>
+              <a:t>つづいて</a:t>
+            </a:r>
+            <a:r>
+              <a:rPr lang="en-US" altLang="ja-JP" sz="2400" b="1" dirty="0">
                 <a:solidFill>
-                  <a:srgbClr val="FF0000"/>
+                  <a:srgbClr val="7030A0"/>
                 </a:solidFill>
               </a:rPr>
-              <a:t>Server.cpp</a:t>
-            </a:r>
-            <a:r>
-              <a:rPr kumimoji="1" lang="ja-JP" altLang="en-US" sz="2400" dirty="0"/>
-              <a:t>を書きます</a:t>
+              <a:t>Server</a:t>
+            </a:r>
+            <a:r>
+              <a:rPr lang="ja-JP" altLang="en-US" sz="2400" b="1" dirty="0">
+                <a:solidFill>
+                  <a:srgbClr val="7030A0"/>
+                </a:solidFill>
+              </a:rPr>
+              <a:t>プロジェクト</a:t>
+            </a:r>
+            <a:r>
+              <a:rPr lang="ja-JP" altLang="en-US" sz="2400" dirty="0"/>
+              <a:t>を開きましょう。</a:t>
             </a:r>
             <a:endParaRPr kumimoji="1" lang="en-US" altLang="ja-JP" sz="2400" dirty="0"/>
           </a:p>
@@ -5131,10 +5660,10 @@
       </p:sp>
       <p:pic>
         <p:nvPicPr>
-          <p:cNvPr id="3" name="図 2">
-            <a:extLst>
-              <a:ext uri="{FF2B5EF4-FFF2-40B4-BE49-F238E27FC236}">
-                <a16:creationId xmlns:a16="http://schemas.microsoft.com/office/drawing/2014/main" id="{90D2D464-A396-4D39-BB72-646E5234D781}"/>
+          <p:cNvPr id="5" name="図 4">
+            <a:extLst>
+              <a:ext uri="{FF2B5EF4-FFF2-40B4-BE49-F238E27FC236}">
+                <a16:creationId xmlns:a16="http://schemas.microsoft.com/office/drawing/2014/main" id="{6E8773F9-30EC-4F44-A601-6D2F998C130B}"/>
               </a:ext>
             </a:extLst>
           </p:cNvPr>
@@ -5151,8 +5680,8 @@
         </p:blipFill>
         <p:spPr>
           <a:xfrm>
-            <a:off x="567542" y="1817793"/>
-            <a:ext cx="9555205" cy="4244339"/>
+            <a:off x="567542" y="1817794"/>
+            <a:ext cx="8407125" cy="4518830"/>
           </a:xfrm>
           <a:prstGeom prst="rect">
             <a:avLst/>
@@ -5162,7 +5691,7 @@
     </p:spTree>
     <p:extLst>
       <p:ext uri="{BB962C8B-B14F-4D97-AF65-F5344CB8AC3E}">
-        <p14:creationId xmlns:p14="http://schemas.microsoft.com/office/powerpoint/2010/main" val="159899517"/>
+        <p14:creationId xmlns:p14="http://schemas.microsoft.com/office/powerpoint/2010/main" val="1460932794"/>
       </p:ext>
     </p:extLst>
   </p:cSld>
@@ -5239,7 +5768,7 @@
         <p:spPr>
           <a:xfrm>
             <a:off x="567542" y="1216429"/>
-            <a:ext cx="6694461" cy="461665"/>
+            <a:ext cx="10724411" cy="461665"/>
           </a:xfrm>
           <a:prstGeom prst="rect">
             <a:avLst/>
@@ -5255,22 +5784,22 @@
             <a:r>
               <a:rPr kumimoji="1" lang="en-US" altLang="ja-JP" sz="2400" b="1" dirty="0" err="1">
                 <a:solidFill>
-                  <a:srgbClr val="0070C0"/>
+                  <a:srgbClr val="FF0000"/>
                 </a:solidFill>
               </a:rPr>
-              <a:t>ReceiveData</a:t>
-            </a:r>
-            <a:r>
-              <a:rPr kumimoji="1" lang="ja-JP" altLang="en-US" sz="2400" b="1" dirty="0">
-                <a:solidFill>
-                  <a:srgbClr val="0070C0"/>
-                </a:solidFill>
-              </a:rPr>
-              <a:t>関数</a:t>
-            </a:r>
-            <a:r>
-              <a:rPr kumimoji="1" lang="ja-JP" altLang="en-US" sz="2400" dirty="0"/>
-              <a:t>は毎フレーム呼び出します。</a:t>
+              <a:t>NetworkCommonParam.h</a:t>
+            </a:r>
+            <a:r>
+              <a:rPr lang="ja-JP" altLang="en-US" sz="2400" dirty="0"/>
+              <a:t>に</a:t>
+            </a:r>
+            <a:r>
+              <a:rPr lang="en-US" altLang="ja-JP" sz="2400" dirty="0"/>
+              <a:t>Client</a:t>
+            </a:r>
+            <a:r>
+              <a:rPr lang="ja-JP" altLang="en-US" sz="2400" dirty="0"/>
+              <a:t>で追加したデータをコピーしましょう。</a:t>
             </a:r>
             <a:endParaRPr kumimoji="1" lang="en-US" altLang="ja-JP" sz="2400" dirty="0"/>
           </a:p>
@@ -5281,7 +5810,7 @@
           <p:cNvPr id="5" name="図 4">
             <a:extLst>
               <a:ext uri="{FF2B5EF4-FFF2-40B4-BE49-F238E27FC236}">
-                <a16:creationId xmlns:a16="http://schemas.microsoft.com/office/drawing/2014/main" id="{BED1D76A-F7B0-402C-B78F-0C7BE5FE1277}"/>
+                <a16:creationId xmlns:a16="http://schemas.microsoft.com/office/drawing/2014/main" id="{3F671132-E53D-4471-B17E-1CF66C4E123F}"/>
               </a:ext>
             </a:extLst>
           </p:cNvPr>
@@ -5298,70 +5827,18 @@
         </p:blipFill>
         <p:spPr>
           <a:xfrm>
-            <a:off x="567542" y="1817794"/>
-            <a:ext cx="6868484" cy="4648849"/>
+            <a:off x="567542" y="2187126"/>
+            <a:ext cx="8002932" cy="2994474"/>
           </a:xfrm>
           <a:prstGeom prst="rect">
             <a:avLst/>
           </a:prstGeom>
         </p:spPr>
       </p:pic>
-      <p:sp>
-        <p:nvSpPr>
-          <p:cNvPr id="7" name="正方形/長方形 6">
-            <a:extLst>
-              <a:ext uri="{FF2B5EF4-FFF2-40B4-BE49-F238E27FC236}">
-                <a16:creationId xmlns:a16="http://schemas.microsoft.com/office/drawing/2014/main" id="{8BC0A634-9BD9-4B8B-BD3C-BE6DA5C61D9B}"/>
-              </a:ext>
-            </a:extLst>
-          </p:cNvPr>
-          <p:cNvSpPr/>
-          <p:nvPr/>
-        </p:nvSpPr>
-        <p:spPr>
-          <a:xfrm>
-            <a:off x="1972733" y="5514571"/>
-            <a:ext cx="1989667" cy="623762"/>
-          </a:xfrm>
-          <a:prstGeom prst="rect">
-            <a:avLst/>
-          </a:prstGeom>
-          <a:noFill/>
-          <a:ln w="38100">
-            <a:solidFill>
-              <a:srgbClr val="FF0000"/>
-            </a:solidFill>
-          </a:ln>
-        </p:spPr>
-        <p:style>
-          <a:lnRef idx="2">
-            <a:schemeClr val="accent1">
-              <a:shade val="50000"/>
-            </a:schemeClr>
-          </a:lnRef>
-          <a:fillRef idx="1">
-            <a:schemeClr val="accent1"/>
-          </a:fillRef>
-          <a:effectRef idx="0">
-            <a:schemeClr val="accent1"/>
-          </a:effectRef>
-          <a:fontRef idx="minor">
-            <a:schemeClr val="lt1"/>
-          </a:fontRef>
-        </p:style>
-        <p:txBody>
-          <a:bodyPr rtlCol="0" anchor="ctr"/>
-          <a:lstStyle/>
-          <a:p>
-            <a:pPr algn="ctr"/>
-            <a:endParaRPr kumimoji="1" lang="ja-JP" altLang="en-US"/>
-          </a:p>
-        </p:txBody>
-      </p:sp>
     </p:spTree>
     <p:extLst>
       <p:ext uri="{BB962C8B-B14F-4D97-AF65-F5344CB8AC3E}">
-        <p14:creationId xmlns:p14="http://schemas.microsoft.com/office/powerpoint/2010/main" val="3992983615"/>
+        <p14:creationId xmlns:p14="http://schemas.microsoft.com/office/powerpoint/2010/main" val="1656401941"/>
       </p:ext>
     </p:extLst>
   </p:cSld>

--- a/ゲーム科3年/00_前期/オンラインゲームプログラミングⅠ/02_データの送受信.pptx
+++ b/ゲーム科3年/00_前期/オンラインゲームプログラミングⅠ/02_データの送受信.pptx
@@ -12,9 +12,14 @@
     <p:sldId id="260" r:id="rId6"/>
     <p:sldId id="261" r:id="rId7"/>
     <p:sldId id="262" r:id="rId8"/>
-    <p:sldId id="263" r:id="rId9"/>
-    <p:sldId id="264" r:id="rId10"/>
-    <p:sldId id="265" r:id="rId11"/>
+    <p:sldId id="264" r:id="rId9"/>
+    <p:sldId id="265" r:id="rId10"/>
+    <p:sldId id="266" r:id="rId11"/>
+    <p:sldId id="267" r:id="rId12"/>
+    <p:sldId id="263" r:id="rId13"/>
+    <p:sldId id="268" r:id="rId14"/>
+    <p:sldId id="270" r:id="rId15"/>
+    <p:sldId id="269" r:id="rId16"/>
   </p:sldIdLst>
   <p:sldSz cx="12192000" cy="6858000"/>
   <p:notesSz cx="6858000" cy="9144000"/>
@@ -268,7 +273,7 @@
           <a:p>
             <a:fld id="{E9CC885B-4903-4D54-9A93-00025F12DED9}" type="datetimeFigureOut">
               <a:rPr kumimoji="1" lang="ja-JP" altLang="en-US" smtClean="0"/>
-              <a:t>2025/10/6</a:t>
+              <a:t>2025/10/7</a:t>
             </a:fld>
             <a:endParaRPr kumimoji="1" lang="ja-JP" altLang="en-US"/>
           </a:p>
@@ -498,7 +503,7 @@
           <a:p>
             <a:fld id="{E9CC885B-4903-4D54-9A93-00025F12DED9}" type="datetimeFigureOut">
               <a:rPr kumimoji="1" lang="ja-JP" altLang="en-US" smtClean="0"/>
-              <a:t>2025/10/6</a:t>
+              <a:t>2025/10/7</a:t>
             </a:fld>
             <a:endParaRPr kumimoji="1" lang="ja-JP" altLang="en-US"/>
           </a:p>
@@ -738,7 +743,7 @@
           <a:p>
             <a:fld id="{E9CC885B-4903-4D54-9A93-00025F12DED9}" type="datetimeFigureOut">
               <a:rPr kumimoji="1" lang="ja-JP" altLang="en-US" smtClean="0"/>
-              <a:t>2025/10/6</a:t>
+              <a:t>2025/10/7</a:t>
             </a:fld>
             <a:endParaRPr kumimoji="1" lang="ja-JP" altLang="en-US"/>
           </a:p>
@@ -968,7 +973,7 @@
           <a:p>
             <a:fld id="{E9CC885B-4903-4D54-9A93-00025F12DED9}" type="datetimeFigureOut">
               <a:rPr kumimoji="1" lang="ja-JP" altLang="en-US" smtClean="0"/>
-              <a:t>2025/10/6</a:t>
+              <a:t>2025/10/7</a:t>
             </a:fld>
             <a:endParaRPr kumimoji="1" lang="ja-JP" altLang="en-US"/>
           </a:p>
@@ -1243,7 +1248,7 @@
           <a:p>
             <a:fld id="{E9CC885B-4903-4D54-9A93-00025F12DED9}" type="datetimeFigureOut">
               <a:rPr kumimoji="1" lang="ja-JP" altLang="en-US" smtClean="0"/>
-              <a:t>2025/10/6</a:t>
+              <a:t>2025/10/7</a:t>
             </a:fld>
             <a:endParaRPr kumimoji="1" lang="ja-JP" altLang="en-US"/>
           </a:p>
@@ -1572,7 +1577,7 @@
           <a:p>
             <a:fld id="{E9CC885B-4903-4D54-9A93-00025F12DED9}" type="datetimeFigureOut">
               <a:rPr kumimoji="1" lang="ja-JP" altLang="en-US" smtClean="0"/>
-              <a:t>2025/10/6</a:t>
+              <a:t>2025/10/7</a:t>
             </a:fld>
             <a:endParaRPr kumimoji="1" lang="ja-JP" altLang="en-US"/>
           </a:p>
@@ -2048,7 +2053,7 @@
           <a:p>
             <a:fld id="{E9CC885B-4903-4D54-9A93-00025F12DED9}" type="datetimeFigureOut">
               <a:rPr kumimoji="1" lang="ja-JP" altLang="en-US" smtClean="0"/>
-              <a:t>2025/10/6</a:t>
+              <a:t>2025/10/7</a:t>
             </a:fld>
             <a:endParaRPr kumimoji="1" lang="ja-JP" altLang="en-US"/>
           </a:p>
@@ -2189,7 +2194,7 @@
           <a:p>
             <a:fld id="{E9CC885B-4903-4D54-9A93-00025F12DED9}" type="datetimeFigureOut">
               <a:rPr kumimoji="1" lang="ja-JP" altLang="en-US" smtClean="0"/>
-              <a:t>2025/10/6</a:t>
+              <a:t>2025/10/7</a:t>
             </a:fld>
             <a:endParaRPr kumimoji="1" lang="ja-JP" altLang="en-US"/>
           </a:p>
@@ -2302,7 +2307,7 @@
           <a:p>
             <a:fld id="{E9CC885B-4903-4D54-9A93-00025F12DED9}" type="datetimeFigureOut">
               <a:rPr kumimoji="1" lang="ja-JP" altLang="en-US" smtClean="0"/>
-              <a:t>2025/10/6</a:t>
+              <a:t>2025/10/7</a:t>
             </a:fld>
             <a:endParaRPr kumimoji="1" lang="ja-JP" altLang="en-US"/>
           </a:p>
@@ -2645,7 +2650,7 @@
           <a:p>
             <a:fld id="{E9CC885B-4903-4D54-9A93-00025F12DED9}" type="datetimeFigureOut">
               <a:rPr kumimoji="1" lang="ja-JP" altLang="en-US" smtClean="0"/>
-              <a:t>2025/10/6</a:t>
+              <a:t>2025/10/7</a:t>
             </a:fld>
             <a:endParaRPr kumimoji="1" lang="ja-JP" altLang="en-US"/>
           </a:p>
@@ -2933,7 +2938,7 @@
           <a:p>
             <a:fld id="{E9CC885B-4903-4D54-9A93-00025F12DED9}" type="datetimeFigureOut">
               <a:rPr kumimoji="1" lang="ja-JP" altLang="en-US" smtClean="0"/>
-              <a:t>2025/10/6</a:t>
+              <a:t>2025/10/7</a:t>
             </a:fld>
             <a:endParaRPr kumimoji="1" lang="ja-JP" altLang="en-US"/>
           </a:p>
@@ -3206,7 +3211,7 @@
           <a:p>
             <a:fld id="{E9CC885B-4903-4D54-9A93-00025F12DED9}" type="datetimeFigureOut">
               <a:rPr kumimoji="1" lang="ja-JP" altLang="en-US" smtClean="0"/>
-              <a:t>2025/10/6</a:t>
+              <a:t>2025/10/7</a:t>
             </a:fld>
             <a:endParaRPr kumimoji="1" lang="ja-JP" altLang="en-US"/>
           </a:p>
@@ -4096,7 +4101,7 @@
         <p:spPr>
           <a:xfrm>
             <a:off x="567542" y="1216429"/>
-            <a:ext cx="11574002" cy="461665"/>
+            <a:ext cx="9289723" cy="461665"/>
           </a:xfrm>
           <a:prstGeom prst="rect">
             <a:avLst/>
@@ -4110,48 +4115,36 @@
           <a:lstStyle/>
           <a:p>
             <a:r>
+              <a:rPr kumimoji="1" lang="ja-JP" altLang="en-US" sz="2400" b="1" dirty="0">
+                <a:solidFill>
+                  <a:srgbClr val="0070C0"/>
+                </a:solidFill>
+              </a:rPr>
+              <a:t>コンストラクタ</a:t>
+            </a:r>
+            <a:r>
+              <a:rPr kumimoji="1" lang="ja-JP" altLang="en-US" sz="2400" dirty="0"/>
+              <a:t>で初期化し、</a:t>
+            </a:r>
+            <a:r>
               <a:rPr kumimoji="1" lang="en-US" altLang="ja-JP" sz="2400" b="1" dirty="0">
                 <a:solidFill>
-                  <a:srgbClr val="00B050"/>
+                  <a:srgbClr val="0070C0"/>
                 </a:solidFill>
               </a:rPr>
-              <a:t>Server</a:t>
+              <a:t>Draw</a:t>
             </a:r>
             <a:r>
               <a:rPr kumimoji="1" lang="ja-JP" altLang="en-US" sz="2400" b="1" dirty="0">
                 <a:solidFill>
-                  <a:srgbClr val="00B050"/>
+                  <a:srgbClr val="0070C0"/>
                 </a:solidFill>
               </a:rPr>
-              <a:t>クラス</a:t>
-            </a:r>
-            <a:r>
-              <a:rPr kumimoji="1" lang="en-US" altLang="ja-JP" sz="2400" b="1" dirty="0">
-                <a:solidFill>
-                  <a:srgbClr val="FF0000"/>
-                </a:solidFill>
-              </a:rPr>
-              <a:t>(</a:t>
-            </a:r>
-            <a:r>
-              <a:rPr kumimoji="1" lang="en-US" altLang="ja-JP" sz="2400" b="1" dirty="0" err="1">
-                <a:solidFill>
-                  <a:srgbClr val="FF0000"/>
-                </a:solidFill>
-              </a:rPr>
-              <a:t>Server.h</a:t>
-            </a:r>
-            <a:r>
-              <a:rPr kumimoji="1" lang="en-US" altLang="ja-JP" sz="2400" b="1" dirty="0">
-                <a:solidFill>
-                  <a:srgbClr val="FF0000"/>
-                </a:solidFill>
-              </a:rPr>
-              <a:t>)</a:t>
+              <a:t>関数</a:t>
             </a:r>
             <a:r>
               <a:rPr kumimoji="1" lang="ja-JP" altLang="en-US" sz="2400" dirty="0"/>
-              <a:t>に受信したチャットデータ用のメンバ変数を追加します。</a:t>
+              <a:t>で内容を描画しましょう。</a:t>
             </a:r>
             <a:endParaRPr kumimoji="1" lang="en-US" altLang="ja-JP" sz="2400" dirty="0"/>
           </a:p>
@@ -4159,10 +4152,10 @@
       </p:sp>
       <p:pic>
         <p:nvPicPr>
-          <p:cNvPr id="3" name="図 2">
-            <a:extLst>
-              <a:ext uri="{FF2B5EF4-FFF2-40B4-BE49-F238E27FC236}">
-                <a16:creationId xmlns:a16="http://schemas.microsoft.com/office/drawing/2014/main" id="{396AE614-71E3-49C3-A211-7B2F3F8FCFC5}"/>
+          <p:cNvPr id="5" name="図 4">
+            <a:extLst>
+              <a:ext uri="{FF2B5EF4-FFF2-40B4-BE49-F238E27FC236}">
+                <a16:creationId xmlns:a16="http://schemas.microsoft.com/office/drawing/2014/main" id="{EC6F0724-9E0B-42EA-A7B6-0F084C1FE3C7}"/>
               </a:ext>
             </a:extLst>
           </p:cNvPr>
@@ -4179,40 +4172,947 @@
         </p:blipFill>
         <p:spPr>
           <a:xfrm>
-            <a:off x="567542" y="1817793"/>
-            <a:ext cx="6625042" cy="1721273"/>
+            <a:off x="567542" y="1817794"/>
+            <a:ext cx="3467584" cy="1124107"/>
           </a:xfrm>
           <a:prstGeom prst="rect">
             <a:avLst/>
           </a:prstGeom>
         </p:spPr>
       </p:pic>
-      <p:sp>
-        <p:nvSpPr>
-          <p:cNvPr id="7" name="正方形/長方形 6">
-            <a:extLst>
-              <a:ext uri="{FF2B5EF4-FFF2-40B4-BE49-F238E27FC236}">
-                <a16:creationId xmlns:a16="http://schemas.microsoft.com/office/drawing/2014/main" id="{24D0C94B-8829-428D-A84D-4C88649CCEF2}"/>
-              </a:ext>
-            </a:extLst>
-          </p:cNvPr>
-          <p:cNvSpPr/>
+      <p:pic>
+        <p:nvPicPr>
+          <p:cNvPr id="9" name="図 8">
+            <a:extLst>
+              <a:ext uri="{FF2B5EF4-FFF2-40B4-BE49-F238E27FC236}">
+                <a16:creationId xmlns:a16="http://schemas.microsoft.com/office/drawing/2014/main" id="{6A6E07F4-2E20-4AFB-B4B0-01FAFA0A1473}"/>
+              </a:ext>
+            </a:extLst>
+          </p:cNvPr>
+          <p:cNvPicPr>
+            <a:picLocks noChangeAspect="1"/>
+          </p:cNvPicPr>
           <p:nvPr/>
-        </p:nvSpPr>
-        <p:spPr>
-          <a:xfrm>
-            <a:off x="2531534" y="2345266"/>
-            <a:ext cx="4661050" cy="618067"/>
+        </p:nvPicPr>
+        <p:blipFill>
+          <a:blip r:embed="rId3"/>
+          <a:stretch>
+            <a:fillRect/>
+          </a:stretch>
+        </p:blipFill>
+        <p:spPr>
+          <a:xfrm>
+            <a:off x="567542" y="3426742"/>
+            <a:ext cx="9211961" cy="2419688"/>
+          </a:xfrm>
+          <a:prstGeom prst="rect">
+            <a:avLst/>
+          </a:prstGeom>
+        </p:spPr>
+      </p:pic>
+    </p:spTree>
+    <p:extLst>
+      <p:ext uri="{BB962C8B-B14F-4D97-AF65-F5344CB8AC3E}">
+        <p14:creationId xmlns:p14="http://schemas.microsoft.com/office/powerpoint/2010/main" val="889169730"/>
+      </p:ext>
+    </p:extLst>
+  </p:cSld>
+  <p:clrMapOvr>
+    <a:masterClrMapping/>
+  </p:clrMapOvr>
+</p:sld>
+</file>
+
+<file path=ppt/slides/slide11.xml><?xml version="1.0" encoding="utf-8"?>
+<p:sld xmlns:a="http://schemas.openxmlformats.org/drawingml/2006/main" xmlns:r="http://schemas.openxmlformats.org/officeDocument/2006/relationships" xmlns:p="http://schemas.openxmlformats.org/presentationml/2006/main">
+  <p:cSld>
+    <p:spTree>
+      <p:nvGrpSpPr>
+        <p:cNvPr id="1" name=""/>
+        <p:cNvGrpSpPr/>
+        <p:nvPr/>
+      </p:nvGrpSpPr>
+      <p:grpSpPr>
+        <a:xfrm>
+          <a:off x="0" y="0"/>
+          <a:ext cx="0" cy="0"/>
+          <a:chOff x="0" y="0"/>
+          <a:chExt cx="0" cy="0"/>
+        </a:xfrm>
+      </p:grpSpPr>
+      <p:sp>
+        <p:nvSpPr>
+          <p:cNvPr id="4" name="テキスト ボックス 3">
+            <a:extLst>
+              <a:ext uri="{FF2B5EF4-FFF2-40B4-BE49-F238E27FC236}">
+                <a16:creationId xmlns:a16="http://schemas.microsoft.com/office/drawing/2014/main" id="{5A13BF46-B8C5-48AA-8308-C9ECFF431A18}"/>
+              </a:ext>
+            </a:extLst>
+          </p:cNvPr>
+          <p:cNvSpPr txBox="1"/>
+          <p:nvPr/>
+        </p:nvSpPr>
+        <p:spPr>
+          <a:xfrm>
+            <a:off x="567542" y="491954"/>
+            <a:ext cx="3057247" cy="584775"/>
           </a:xfrm>
           <a:prstGeom prst="rect">
             <a:avLst/>
           </a:prstGeom>
           <a:noFill/>
-          <a:ln w="38100">
-            <a:solidFill>
-              <a:srgbClr val="FF0000"/>
-            </a:solidFill>
-          </a:ln>
+        </p:spPr>
+        <p:txBody>
+          <a:bodyPr wrap="none" rtlCol="0">
+            <a:spAutoFit/>
+          </a:bodyPr>
+          <a:lstStyle/>
+          <a:p>
+            <a:r>
+              <a:rPr kumimoji="1" lang="ja-JP" altLang="en-US" sz="3200" b="1" u="sng" dirty="0"/>
+              <a:t>データの送受信</a:t>
+            </a:r>
+          </a:p>
+        </p:txBody>
+      </p:sp>
+      <p:sp>
+        <p:nvSpPr>
+          <p:cNvPr id="6" name="テキスト ボックス 5">
+            <a:extLst>
+              <a:ext uri="{FF2B5EF4-FFF2-40B4-BE49-F238E27FC236}">
+                <a16:creationId xmlns:a16="http://schemas.microsoft.com/office/drawing/2014/main" id="{55830AD6-028B-4C4E-80BF-B70DFC1C3A46}"/>
+              </a:ext>
+            </a:extLst>
+          </p:cNvPr>
+          <p:cNvSpPr txBox="1"/>
+          <p:nvPr/>
+        </p:nvSpPr>
+        <p:spPr>
+          <a:xfrm>
+            <a:off x="567542" y="1216429"/>
+            <a:ext cx="6386685" cy="461665"/>
+          </a:xfrm>
+          <a:prstGeom prst="rect">
+            <a:avLst/>
+          </a:prstGeom>
+          <a:noFill/>
+        </p:spPr>
+        <p:txBody>
+          <a:bodyPr wrap="none" rtlCol="0">
+            <a:spAutoFit/>
+          </a:bodyPr>
+          <a:lstStyle/>
+          <a:p>
+            <a:r>
+              <a:rPr lang="en-US" altLang="ja-JP" sz="2400" b="1" dirty="0" err="1">
+                <a:solidFill>
+                  <a:srgbClr val="0070C0"/>
+                </a:solidFill>
+              </a:rPr>
+              <a:t>ReceiveData</a:t>
+            </a:r>
+            <a:r>
+              <a:rPr lang="ja-JP" altLang="en-US" sz="2400" b="1" dirty="0">
+                <a:solidFill>
+                  <a:srgbClr val="0070C0"/>
+                </a:solidFill>
+              </a:rPr>
+              <a:t>関数</a:t>
+            </a:r>
+            <a:r>
+              <a:rPr lang="ja-JP" altLang="en-US" sz="2400" dirty="0"/>
+              <a:t>に受信処理を追加します。</a:t>
+            </a:r>
+            <a:endParaRPr kumimoji="1" lang="en-US" altLang="ja-JP" sz="2400" dirty="0"/>
+          </a:p>
+        </p:txBody>
+      </p:sp>
+      <p:pic>
+        <p:nvPicPr>
+          <p:cNvPr id="3" name="図 2">
+            <a:extLst>
+              <a:ext uri="{FF2B5EF4-FFF2-40B4-BE49-F238E27FC236}">
+                <a16:creationId xmlns:a16="http://schemas.microsoft.com/office/drawing/2014/main" id="{4A8E5FAE-27F9-4750-A2E4-361B0B7EAED6}"/>
+              </a:ext>
+            </a:extLst>
+          </p:cNvPr>
+          <p:cNvPicPr>
+            <a:picLocks noChangeAspect="1"/>
+          </p:cNvPicPr>
+          <p:nvPr/>
+        </p:nvPicPr>
+        <p:blipFill>
+          <a:blip r:embed="rId2"/>
+          <a:stretch>
+            <a:fillRect/>
+          </a:stretch>
+        </p:blipFill>
+        <p:spPr>
+          <a:xfrm>
+            <a:off x="567542" y="1817794"/>
+            <a:ext cx="8602275" cy="2000529"/>
+          </a:xfrm>
+          <a:prstGeom prst="rect">
+            <a:avLst/>
+          </a:prstGeom>
+        </p:spPr>
+      </p:pic>
+      <p:sp>
+        <p:nvSpPr>
+          <p:cNvPr id="8" name="テキスト ボックス 7">
+            <a:extLst>
+              <a:ext uri="{FF2B5EF4-FFF2-40B4-BE49-F238E27FC236}">
+                <a16:creationId xmlns:a16="http://schemas.microsoft.com/office/drawing/2014/main" id="{BD37E74D-08AD-44F6-97D8-8B7FA0F6750F}"/>
+              </a:ext>
+            </a:extLst>
+          </p:cNvPr>
+          <p:cNvSpPr txBox="1"/>
+          <p:nvPr/>
+        </p:nvSpPr>
+        <p:spPr>
+          <a:xfrm>
+            <a:off x="567541" y="3973911"/>
+            <a:ext cx="6694461" cy="830997"/>
+          </a:xfrm>
+          <a:prstGeom prst="rect">
+            <a:avLst/>
+          </a:prstGeom>
+          <a:noFill/>
+        </p:spPr>
+        <p:txBody>
+          <a:bodyPr wrap="none" rtlCol="0">
+            <a:spAutoFit/>
+          </a:bodyPr>
+          <a:lstStyle/>
+          <a:p>
+            <a:r>
+              <a:rPr lang="en-US" altLang="ja-JP" sz="2400" b="1" dirty="0" err="1">
+                <a:solidFill>
+                  <a:srgbClr val="0070C0"/>
+                </a:solidFill>
+              </a:rPr>
+              <a:t>ReceiveData</a:t>
+            </a:r>
+            <a:r>
+              <a:rPr lang="ja-JP" altLang="en-US" sz="2400" b="1" dirty="0">
+                <a:solidFill>
+                  <a:srgbClr val="0070C0"/>
+                </a:solidFill>
+              </a:rPr>
+              <a:t>関数</a:t>
+            </a:r>
+            <a:r>
+              <a:rPr lang="ja-JP" altLang="en-US" sz="2400" dirty="0"/>
+              <a:t>は毎フレーム呼び出します。</a:t>
+            </a:r>
+            <a:endParaRPr lang="en-US" altLang="ja-JP" sz="2400" dirty="0"/>
+          </a:p>
+          <a:p>
+            <a:r>
+              <a:rPr kumimoji="1" lang="en-US" altLang="ja-JP" sz="2400" b="1" dirty="0">
+                <a:solidFill>
+                  <a:srgbClr val="0070C0"/>
+                </a:solidFill>
+              </a:rPr>
+              <a:t>Update</a:t>
+            </a:r>
+            <a:r>
+              <a:rPr kumimoji="1" lang="ja-JP" altLang="en-US" sz="2400" b="1" dirty="0">
+                <a:solidFill>
+                  <a:srgbClr val="0070C0"/>
+                </a:solidFill>
+              </a:rPr>
+              <a:t>関数</a:t>
+            </a:r>
+            <a:r>
+              <a:rPr kumimoji="1" lang="ja-JP" altLang="en-US" sz="2400" dirty="0"/>
+              <a:t>を確認しましょう。</a:t>
+            </a:r>
+            <a:endParaRPr kumimoji="1" lang="en-US" altLang="ja-JP" sz="2400" dirty="0"/>
+          </a:p>
+        </p:txBody>
+      </p:sp>
+    </p:spTree>
+    <p:extLst>
+      <p:ext uri="{BB962C8B-B14F-4D97-AF65-F5344CB8AC3E}">
+        <p14:creationId xmlns:p14="http://schemas.microsoft.com/office/powerpoint/2010/main" val="1628627159"/>
+      </p:ext>
+    </p:extLst>
+  </p:cSld>
+  <p:clrMapOvr>
+    <a:masterClrMapping/>
+  </p:clrMapOvr>
+</p:sld>
+</file>
+
+<file path=ppt/slides/slide12.xml><?xml version="1.0" encoding="utf-8"?>
+<p:sld xmlns:a="http://schemas.openxmlformats.org/drawingml/2006/main" xmlns:r="http://schemas.openxmlformats.org/officeDocument/2006/relationships" xmlns:p="http://schemas.openxmlformats.org/presentationml/2006/main">
+  <p:cSld>
+    <p:spTree>
+      <p:nvGrpSpPr>
+        <p:cNvPr id="1" name=""/>
+        <p:cNvGrpSpPr/>
+        <p:nvPr/>
+      </p:nvGrpSpPr>
+      <p:grpSpPr>
+        <a:xfrm>
+          <a:off x="0" y="0"/>
+          <a:ext cx="0" cy="0"/>
+          <a:chOff x="0" y="0"/>
+          <a:chExt cx="0" cy="0"/>
+        </a:xfrm>
+      </p:grpSpPr>
+      <p:sp>
+        <p:nvSpPr>
+          <p:cNvPr id="4" name="テキスト ボックス 3">
+            <a:extLst>
+              <a:ext uri="{FF2B5EF4-FFF2-40B4-BE49-F238E27FC236}">
+                <a16:creationId xmlns:a16="http://schemas.microsoft.com/office/drawing/2014/main" id="{5A13BF46-B8C5-48AA-8308-C9ECFF431A18}"/>
+              </a:ext>
+            </a:extLst>
+          </p:cNvPr>
+          <p:cNvSpPr txBox="1"/>
+          <p:nvPr/>
+        </p:nvSpPr>
+        <p:spPr>
+          <a:xfrm>
+            <a:off x="567542" y="491954"/>
+            <a:ext cx="3057247" cy="584775"/>
+          </a:xfrm>
+          <a:prstGeom prst="rect">
+            <a:avLst/>
+          </a:prstGeom>
+          <a:noFill/>
+        </p:spPr>
+        <p:txBody>
+          <a:bodyPr wrap="none" rtlCol="0">
+            <a:spAutoFit/>
+          </a:bodyPr>
+          <a:lstStyle/>
+          <a:p>
+            <a:r>
+              <a:rPr kumimoji="1" lang="ja-JP" altLang="en-US" sz="3200" b="1" u="sng" dirty="0"/>
+              <a:t>データの送受信</a:t>
+            </a:r>
+          </a:p>
+        </p:txBody>
+      </p:sp>
+      <p:sp>
+        <p:nvSpPr>
+          <p:cNvPr id="6" name="テキスト ボックス 5">
+            <a:extLst>
+              <a:ext uri="{FF2B5EF4-FFF2-40B4-BE49-F238E27FC236}">
+                <a16:creationId xmlns:a16="http://schemas.microsoft.com/office/drawing/2014/main" id="{55830AD6-028B-4C4E-80BF-B70DFC1C3A46}"/>
+              </a:ext>
+            </a:extLst>
+          </p:cNvPr>
+          <p:cNvSpPr txBox="1"/>
+          <p:nvPr/>
+        </p:nvSpPr>
+        <p:spPr>
+          <a:xfrm>
+            <a:off x="567542" y="1216429"/>
+            <a:ext cx="6694461" cy="461665"/>
+          </a:xfrm>
+          <a:prstGeom prst="rect">
+            <a:avLst/>
+          </a:prstGeom>
+          <a:noFill/>
+        </p:spPr>
+        <p:txBody>
+          <a:bodyPr wrap="none" rtlCol="0">
+            <a:spAutoFit/>
+          </a:bodyPr>
+          <a:lstStyle/>
+          <a:p>
+            <a:r>
+              <a:rPr lang="ja-JP" altLang="en-US" sz="2400" dirty="0"/>
+              <a:t>つづいて</a:t>
+            </a:r>
+            <a:r>
+              <a:rPr lang="en-US" altLang="ja-JP" sz="2400" b="1" dirty="0">
+                <a:solidFill>
+                  <a:srgbClr val="7030A0"/>
+                </a:solidFill>
+              </a:rPr>
+              <a:t>Server</a:t>
+            </a:r>
+            <a:r>
+              <a:rPr lang="ja-JP" altLang="en-US" sz="2400" b="1" dirty="0">
+                <a:solidFill>
+                  <a:srgbClr val="7030A0"/>
+                </a:solidFill>
+              </a:rPr>
+              <a:t>プロジェクト</a:t>
+            </a:r>
+            <a:r>
+              <a:rPr lang="ja-JP" altLang="en-US" sz="2400" dirty="0"/>
+              <a:t>を開きましょう。</a:t>
+            </a:r>
+            <a:endParaRPr kumimoji="1" lang="en-US" altLang="ja-JP" sz="2400" dirty="0"/>
+          </a:p>
+        </p:txBody>
+      </p:sp>
+      <p:pic>
+        <p:nvPicPr>
+          <p:cNvPr id="5" name="図 4">
+            <a:extLst>
+              <a:ext uri="{FF2B5EF4-FFF2-40B4-BE49-F238E27FC236}">
+                <a16:creationId xmlns:a16="http://schemas.microsoft.com/office/drawing/2014/main" id="{6E8773F9-30EC-4F44-A601-6D2F998C130B}"/>
+              </a:ext>
+            </a:extLst>
+          </p:cNvPr>
+          <p:cNvPicPr>
+            <a:picLocks noChangeAspect="1"/>
+          </p:cNvPicPr>
+          <p:nvPr/>
+        </p:nvPicPr>
+        <p:blipFill>
+          <a:blip r:embed="rId2"/>
+          <a:stretch>
+            <a:fillRect/>
+          </a:stretch>
+        </p:blipFill>
+        <p:spPr>
+          <a:xfrm>
+            <a:off x="567542" y="1817794"/>
+            <a:ext cx="8407125" cy="4518830"/>
+          </a:xfrm>
+          <a:prstGeom prst="rect">
+            <a:avLst/>
+          </a:prstGeom>
+        </p:spPr>
+      </p:pic>
+    </p:spTree>
+    <p:extLst>
+      <p:ext uri="{BB962C8B-B14F-4D97-AF65-F5344CB8AC3E}">
+        <p14:creationId xmlns:p14="http://schemas.microsoft.com/office/powerpoint/2010/main" val="1460932794"/>
+      </p:ext>
+    </p:extLst>
+  </p:cSld>
+  <p:clrMapOvr>
+    <a:masterClrMapping/>
+  </p:clrMapOvr>
+</p:sld>
+</file>
+
+<file path=ppt/slides/slide13.xml><?xml version="1.0" encoding="utf-8"?>
+<p:sld xmlns:a="http://schemas.openxmlformats.org/drawingml/2006/main" xmlns:r="http://schemas.openxmlformats.org/officeDocument/2006/relationships" xmlns:p="http://schemas.openxmlformats.org/presentationml/2006/main">
+  <p:cSld>
+    <p:spTree>
+      <p:nvGrpSpPr>
+        <p:cNvPr id="1" name=""/>
+        <p:cNvGrpSpPr/>
+        <p:nvPr/>
+      </p:nvGrpSpPr>
+      <p:grpSpPr>
+        <a:xfrm>
+          <a:off x="0" y="0"/>
+          <a:ext cx="0" cy="0"/>
+          <a:chOff x="0" y="0"/>
+          <a:chExt cx="0" cy="0"/>
+        </a:xfrm>
+      </p:grpSpPr>
+      <p:sp>
+        <p:nvSpPr>
+          <p:cNvPr id="4" name="テキスト ボックス 3">
+            <a:extLst>
+              <a:ext uri="{FF2B5EF4-FFF2-40B4-BE49-F238E27FC236}">
+                <a16:creationId xmlns:a16="http://schemas.microsoft.com/office/drawing/2014/main" id="{5A13BF46-B8C5-48AA-8308-C9ECFF431A18}"/>
+              </a:ext>
+            </a:extLst>
+          </p:cNvPr>
+          <p:cNvSpPr txBox="1"/>
+          <p:nvPr/>
+        </p:nvSpPr>
+        <p:spPr>
+          <a:xfrm>
+            <a:off x="567542" y="491954"/>
+            <a:ext cx="3057247" cy="584775"/>
+          </a:xfrm>
+          <a:prstGeom prst="rect">
+            <a:avLst/>
+          </a:prstGeom>
+          <a:noFill/>
+        </p:spPr>
+        <p:txBody>
+          <a:bodyPr wrap="none" rtlCol="0">
+            <a:spAutoFit/>
+          </a:bodyPr>
+          <a:lstStyle/>
+          <a:p>
+            <a:r>
+              <a:rPr kumimoji="1" lang="ja-JP" altLang="en-US" sz="3200" b="1" u="sng" dirty="0"/>
+              <a:t>データの送受信</a:t>
+            </a:r>
+          </a:p>
+        </p:txBody>
+      </p:sp>
+      <p:sp>
+        <p:nvSpPr>
+          <p:cNvPr id="6" name="テキスト ボックス 5">
+            <a:extLst>
+              <a:ext uri="{FF2B5EF4-FFF2-40B4-BE49-F238E27FC236}">
+                <a16:creationId xmlns:a16="http://schemas.microsoft.com/office/drawing/2014/main" id="{55830AD6-028B-4C4E-80BF-B70DFC1C3A46}"/>
+              </a:ext>
+            </a:extLst>
+          </p:cNvPr>
+          <p:cNvSpPr txBox="1"/>
+          <p:nvPr/>
+        </p:nvSpPr>
+        <p:spPr>
+          <a:xfrm>
+            <a:off x="567542" y="1216429"/>
+            <a:ext cx="8618065" cy="3416320"/>
+          </a:xfrm>
+          <a:prstGeom prst="rect">
+            <a:avLst/>
+          </a:prstGeom>
+          <a:noFill/>
+        </p:spPr>
+        <p:txBody>
+          <a:bodyPr wrap="none" rtlCol="0">
+            <a:spAutoFit/>
+          </a:bodyPr>
+          <a:lstStyle/>
+          <a:p>
+            <a:r>
+              <a:rPr lang="ja-JP" altLang="en-US" sz="2400" dirty="0"/>
+              <a:t>データ受信には</a:t>
+            </a:r>
+            <a:r>
+              <a:rPr lang="en-US" altLang="ja-JP" sz="2400" b="1" dirty="0" err="1">
+                <a:solidFill>
+                  <a:srgbClr val="0070C0"/>
+                </a:solidFill>
+              </a:rPr>
+              <a:t>NetWorkRecv</a:t>
+            </a:r>
+            <a:r>
+              <a:rPr lang="ja-JP" altLang="en-US" sz="2400" b="1" dirty="0">
+                <a:solidFill>
+                  <a:srgbClr val="0070C0"/>
+                </a:solidFill>
+              </a:rPr>
+              <a:t>関数</a:t>
+            </a:r>
+            <a:r>
+              <a:rPr lang="ja-JP" altLang="en-US" sz="2400" dirty="0"/>
+              <a:t>を使用します。</a:t>
+            </a:r>
+            <a:endParaRPr lang="en-US" altLang="ja-JP" sz="2400" dirty="0"/>
+          </a:p>
+          <a:p>
+            <a:endParaRPr kumimoji="1" lang="en-US" altLang="ja-JP" sz="2400" b="1" dirty="0">
+              <a:solidFill>
+                <a:srgbClr val="FF0000"/>
+              </a:solidFill>
+            </a:endParaRPr>
+          </a:p>
+          <a:p>
+            <a:r>
+              <a:rPr kumimoji="1" lang="en-US" altLang="ja-JP" sz="2400" dirty="0">
+                <a:solidFill>
+                  <a:srgbClr val="0070C0"/>
+                </a:solidFill>
+              </a:rPr>
+              <a:t>int</a:t>
+            </a:r>
+            <a:r>
+              <a:rPr kumimoji="1" lang="en-US" altLang="ja-JP" sz="2400" b="1" dirty="0">
+                <a:solidFill>
+                  <a:srgbClr val="FF0000"/>
+                </a:solidFill>
+              </a:rPr>
+              <a:t> </a:t>
+            </a:r>
+            <a:r>
+              <a:rPr kumimoji="1" lang="en-US" altLang="ja-JP" sz="2400" dirty="0" err="1"/>
+              <a:t>NetWorkRecv</a:t>
+            </a:r>
+            <a:r>
+              <a:rPr kumimoji="1" lang="en-US" altLang="ja-JP" sz="2400" dirty="0"/>
+              <a:t>( </a:t>
+            </a:r>
+            <a:r>
+              <a:rPr kumimoji="1" lang="en-US" altLang="ja-JP" sz="2400" dirty="0">
+                <a:solidFill>
+                  <a:srgbClr val="0070C0"/>
+                </a:solidFill>
+              </a:rPr>
+              <a:t>int</a:t>
+            </a:r>
+            <a:r>
+              <a:rPr kumimoji="1" lang="en-US" altLang="ja-JP" sz="2400" dirty="0"/>
+              <a:t> </a:t>
+            </a:r>
+            <a:r>
+              <a:rPr kumimoji="1" lang="en-US" altLang="ja-JP" sz="2400" dirty="0" err="1"/>
+              <a:t>NetHandle</a:t>
+            </a:r>
+            <a:r>
+              <a:rPr kumimoji="1" lang="en-US" altLang="ja-JP" sz="2400" dirty="0"/>
+              <a:t>, </a:t>
+            </a:r>
+            <a:r>
+              <a:rPr kumimoji="1" lang="en-US" altLang="ja-JP" sz="2400" dirty="0">
+                <a:solidFill>
+                  <a:srgbClr val="0070C0"/>
+                </a:solidFill>
+              </a:rPr>
+              <a:t>void</a:t>
+            </a:r>
+            <a:r>
+              <a:rPr kumimoji="1" lang="en-US" altLang="ja-JP" sz="2400" dirty="0"/>
+              <a:t> *Buffer, </a:t>
+            </a:r>
+            <a:r>
+              <a:rPr kumimoji="1" lang="en-US" altLang="ja-JP" sz="2400" dirty="0">
+                <a:solidFill>
+                  <a:srgbClr val="0070C0"/>
+                </a:solidFill>
+              </a:rPr>
+              <a:t>int</a:t>
+            </a:r>
+            <a:r>
+              <a:rPr kumimoji="1" lang="en-US" altLang="ja-JP" sz="2400" dirty="0"/>
+              <a:t> Length ) ;</a:t>
+            </a:r>
+          </a:p>
+          <a:p>
+            <a:endParaRPr kumimoji="1" lang="en-US" altLang="ja-JP" sz="2400" b="1" dirty="0">
+              <a:solidFill>
+                <a:srgbClr val="FF0000"/>
+              </a:solidFill>
+            </a:endParaRPr>
+          </a:p>
+          <a:p>
+            <a:r>
+              <a:rPr kumimoji="1" lang="en-US" altLang="ja-JP" sz="2400" dirty="0" err="1"/>
+              <a:t>NetHandle</a:t>
+            </a:r>
+            <a:r>
+              <a:rPr kumimoji="1" lang="en-US" altLang="ja-JP" sz="2400" dirty="0"/>
+              <a:t>	</a:t>
+            </a:r>
+            <a:r>
+              <a:rPr kumimoji="1" lang="ja-JP" altLang="en-US" sz="2400" dirty="0"/>
+              <a:t>・・・受信先ハンドル</a:t>
+            </a:r>
+            <a:endParaRPr kumimoji="1" lang="en-US" altLang="ja-JP" sz="2400" dirty="0"/>
+          </a:p>
+          <a:p>
+            <a:r>
+              <a:rPr kumimoji="1" lang="en-US" altLang="ja-JP" sz="2400" dirty="0"/>
+              <a:t>Buffer		</a:t>
+            </a:r>
+            <a:r>
+              <a:rPr kumimoji="1" lang="ja-JP" altLang="en-US" sz="2400" dirty="0"/>
+              <a:t>・・・受信データ</a:t>
+            </a:r>
+            <a:endParaRPr kumimoji="1" lang="en-US" altLang="ja-JP" sz="2400" dirty="0"/>
+          </a:p>
+          <a:p>
+            <a:r>
+              <a:rPr kumimoji="1" lang="en-US" altLang="ja-JP" sz="2400" dirty="0"/>
+              <a:t>Length	</a:t>
+            </a:r>
+            <a:r>
+              <a:rPr kumimoji="1" lang="ja-JP" altLang="en-US" sz="2400" dirty="0"/>
+              <a:t>・・・受信データの長さ</a:t>
+            </a:r>
+            <a:endParaRPr kumimoji="1" lang="en-US" altLang="ja-JP" sz="2400" dirty="0"/>
+          </a:p>
+          <a:p>
+            <a:endParaRPr lang="en-US" altLang="ja-JP" sz="2400" dirty="0"/>
+          </a:p>
+          <a:p>
+            <a:r>
+              <a:rPr kumimoji="1" lang="en-US" altLang="ja-JP" sz="2400" dirty="0"/>
+              <a:t>※</a:t>
+            </a:r>
+            <a:r>
+              <a:rPr kumimoji="1" lang="ja-JP" altLang="en-US" sz="2400" dirty="0"/>
+              <a:t>今回、受信データは</a:t>
+            </a:r>
+            <a:r>
+              <a:rPr kumimoji="1" lang="en-US" altLang="ja-JP" sz="2400" b="1" dirty="0" err="1"/>
+              <a:t>m_ChatData</a:t>
+            </a:r>
+            <a:r>
+              <a:rPr kumimoji="1" lang="ja-JP" altLang="en-US" sz="2400" dirty="0"/>
+              <a:t>に格納されます。</a:t>
+            </a:r>
+            <a:endParaRPr kumimoji="1" lang="en-US" altLang="ja-JP" sz="2400" dirty="0"/>
+          </a:p>
+        </p:txBody>
+      </p:sp>
+    </p:spTree>
+    <p:extLst>
+      <p:ext uri="{BB962C8B-B14F-4D97-AF65-F5344CB8AC3E}">
+        <p14:creationId xmlns:p14="http://schemas.microsoft.com/office/powerpoint/2010/main" val="1679938287"/>
+      </p:ext>
+    </p:extLst>
+  </p:cSld>
+  <p:clrMapOvr>
+    <a:masterClrMapping/>
+  </p:clrMapOvr>
+</p:sld>
+</file>
+
+<file path=ppt/slides/slide14.xml><?xml version="1.0" encoding="utf-8"?>
+<p:sld xmlns:a="http://schemas.openxmlformats.org/drawingml/2006/main" xmlns:r="http://schemas.openxmlformats.org/officeDocument/2006/relationships" xmlns:p="http://schemas.openxmlformats.org/presentationml/2006/main">
+  <p:cSld>
+    <p:spTree>
+      <p:nvGrpSpPr>
+        <p:cNvPr id="1" name=""/>
+        <p:cNvGrpSpPr/>
+        <p:nvPr/>
+      </p:nvGrpSpPr>
+      <p:grpSpPr>
+        <a:xfrm>
+          <a:off x="0" y="0"/>
+          <a:ext cx="0" cy="0"/>
+          <a:chOff x="0" y="0"/>
+          <a:chExt cx="0" cy="0"/>
+        </a:xfrm>
+      </p:grpSpPr>
+      <p:sp>
+        <p:nvSpPr>
+          <p:cNvPr id="4" name="テキスト ボックス 3">
+            <a:extLst>
+              <a:ext uri="{FF2B5EF4-FFF2-40B4-BE49-F238E27FC236}">
+                <a16:creationId xmlns:a16="http://schemas.microsoft.com/office/drawing/2014/main" id="{5A13BF46-B8C5-48AA-8308-C9ECFF431A18}"/>
+              </a:ext>
+            </a:extLst>
+          </p:cNvPr>
+          <p:cNvSpPr txBox="1"/>
+          <p:nvPr/>
+        </p:nvSpPr>
+        <p:spPr>
+          <a:xfrm>
+            <a:off x="567542" y="491954"/>
+            <a:ext cx="3057247" cy="584775"/>
+          </a:xfrm>
+          <a:prstGeom prst="rect">
+            <a:avLst/>
+          </a:prstGeom>
+          <a:noFill/>
+        </p:spPr>
+        <p:txBody>
+          <a:bodyPr wrap="none" rtlCol="0">
+            <a:spAutoFit/>
+          </a:bodyPr>
+          <a:lstStyle/>
+          <a:p>
+            <a:r>
+              <a:rPr kumimoji="1" lang="ja-JP" altLang="en-US" sz="3200" b="1" u="sng" dirty="0"/>
+              <a:t>データの送受信</a:t>
+            </a:r>
+          </a:p>
+        </p:txBody>
+      </p:sp>
+      <p:sp>
+        <p:nvSpPr>
+          <p:cNvPr id="6" name="テキスト ボックス 5">
+            <a:extLst>
+              <a:ext uri="{FF2B5EF4-FFF2-40B4-BE49-F238E27FC236}">
+                <a16:creationId xmlns:a16="http://schemas.microsoft.com/office/drawing/2014/main" id="{55830AD6-028B-4C4E-80BF-B70DFC1C3A46}"/>
+              </a:ext>
+            </a:extLst>
+          </p:cNvPr>
+          <p:cNvSpPr txBox="1"/>
+          <p:nvPr/>
+        </p:nvSpPr>
+        <p:spPr>
+          <a:xfrm>
+            <a:off x="567542" y="1216429"/>
+            <a:ext cx="7571303" cy="830997"/>
+          </a:xfrm>
+          <a:prstGeom prst="rect">
+            <a:avLst/>
+          </a:prstGeom>
+          <a:noFill/>
+        </p:spPr>
+        <p:txBody>
+          <a:bodyPr wrap="none" rtlCol="0">
+            <a:spAutoFit/>
+          </a:bodyPr>
+          <a:lstStyle/>
+          <a:p>
+            <a:r>
+              <a:rPr kumimoji="1" lang="ja-JP" altLang="en-US" sz="2400" dirty="0"/>
+              <a:t>クライアントとサーバー両方を実行し、</a:t>
+            </a:r>
+            <a:endParaRPr kumimoji="1" lang="en-US" altLang="ja-JP" sz="2400" dirty="0"/>
+          </a:p>
+          <a:p>
+            <a:r>
+              <a:rPr lang="ja-JP" altLang="en-US" sz="2400" dirty="0"/>
+              <a:t>サーバーに向けてメッセージを送信してみましょう。</a:t>
+            </a:r>
+            <a:endParaRPr kumimoji="1" lang="en-US" altLang="ja-JP" sz="2400" dirty="0"/>
+          </a:p>
+        </p:txBody>
+      </p:sp>
+      <p:pic>
+        <p:nvPicPr>
+          <p:cNvPr id="3" name="図 2">
+            <a:extLst>
+              <a:ext uri="{FF2B5EF4-FFF2-40B4-BE49-F238E27FC236}">
+                <a16:creationId xmlns:a16="http://schemas.microsoft.com/office/drawing/2014/main" id="{036CA206-CA1A-40A5-941F-B86630C3512E}"/>
+              </a:ext>
+            </a:extLst>
+          </p:cNvPr>
+          <p:cNvPicPr>
+            <a:picLocks noChangeAspect="1"/>
+          </p:cNvPicPr>
+          <p:nvPr/>
+        </p:nvPicPr>
+        <p:blipFill>
+          <a:blip r:embed="rId2"/>
+          <a:stretch>
+            <a:fillRect/>
+          </a:stretch>
+        </p:blipFill>
+        <p:spPr>
+          <a:xfrm>
+            <a:off x="567542" y="2187125"/>
+            <a:ext cx="3530492" cy="2623449"/>
+          </a:xfrm>
+          <a:prstGeom prst="rect">
+            <a:avLst/>
+          </a:prstGeom>
+        </p:spPr>
+      </p:pic>
+      <p:pic>
+        <p:nvPicPr>
+          <p:cNvPr id="7" name="図 6">
+            <a:extLst>
+              <a:ext uri="{FF2B5EF4-FFF2-40B4-BE49-F238E27FC236}">
+                <a16:creationId xmlns:a16="http://schemas.microsoft.com/office/drawing/2014/main" id="{A4C20CF1-1D47-4CD8-8273-DE57237AAF10}"/>
+              </a:ext>
+            </a:extLst>
+          </p:cNvPr>
+          <p:cNvPicPr>
+            <a:picLocks noChangeAspect="1"/>
+          </p:cNvPicPr>
+          <p:nvPr/>
+        </p:nvPicPr>
+        <p:blipFill>
+          <a:blip r:embed="rId3"/>
+          <a:stretch>
+            <a:fillRect/>
+          </a:stretch>
+        </p:blipFill>
+        <p:spPr>
+          <a:xfrm>
+            <a:off x="6644273" y="2187124"/>
+            <a:ext cx="2989143" cy="2623449"/>
+          </a:xfrm>
+          <a:prstGeom prst="rect">
+            <a:avLst/>
+          </a:prstGeom>
+        </p:spPr>
+      </p:pic>
+      <p:sp>
+        <p:nvSpPr>
+          <p:cNvPr id="8" name="テキスト ボックス 7">
+            <a:extLst>
+              <a:ext uri="{FF2B5EF4-FFF2-40B4-BE49-F238E27FC236}">
+                <a16:creationId xmlns:a16="http://schemas.microsoft.com/office/drawing/2014/main" id="{A1AEC1E6-79C9-4B97-AF93-A16BEF0E4040}"/>
+              </a:ext>
+            </a:extLst>
+          </p:cNvPr>
+          <p:cNvSpPr txBox="1"/>
+          <p:nvPr/>
+        </p:nvSpPr>
+        <p:spPr>
+          <a:xfrm>
+            <a:off x="1589455" y="5077585"/>
+            <a:ext cx="1071127" cy="461665"/>
+          </a:xfrm>
+          <a:prstGeom prst="rect">
+            <a:avLst/>
+          </a:prstGeom>
+          <a:noFill/>
+        </p:spPr>
+        <p:txBody>
+          <a:bodyPr wrap="none" rtlCol="0">
+            <a:spAutoFit/>
+          </a:bodyPr>
+          <a:lstStyle/>
+          <a:p>
+            <a:r>
+              <a:rPr kumimoji="1" lang="en-US" altLang="ja-JP" sz="2400" b="1" dirty="0">
+                <a:solidFill>
+                  <a:srgbClr val="0070C0"/>
+                </a:solidFill>
+              </a:rPr>
+              <a:t>Client</a:t>
+            </a:r>
+          </a:p>
+        </p:txBody>
+      </p:sp>
+      <p:sp>
+        <p:nvSpPr>
+          <p:cNvPr id="9" name="テキスト ボックス 8">
+            <a:extLst>
+              <a:ext uri="{FF2B5EF4-FFF2-40B4-BE49-F238E27FC236}">
+                <a16:creationId xmlns:a16="http://schemas.microsoft.com/office/drawing/2014/main" id="{471FA113-E436-4EB1-9197-67787C603F1D}"/>
+              </a:ext>
+            </a:extLst>
+          </p:cNvPr>
+          <p:cNvSpPr txBox="1"/>
+          <p:nvPr/>
+        </p:nvSpPr>
+        <p:spPr>
+          <a:xfrm>
+            <a:off x="7739243" y="5077584"/>
+            <a:ext cx="1154483" cy="461665"/>
+          </a:xfrm>
+          <a:prstGeom prst="rect">
+            <a:avLst/>
+          </a:prstGeom>
+          <a:noFill/>
+        </p:spPr>
+        <p:txBody>
+          <a:bodyPr wrap="none" rtlCol="0">
+            <a:spAutoFit/>
+          </a:bodyPr>
+          <a:lstStyle/>
+          <a:p>
+            <a:r>
+              <a:rPr kumimoji="1" lang="en-US" altLang="ja-JP" sz="2400" b="1" dirty="0">
+                <a:solidFill>
+                  <a:srgbClr val="00B050"/>
+                </a:solidFill>
+              </a:rPr>
+              <a:t>Server</a:t>
+            </a:r>
+          </a:p>
+        </p:txBody>
+      </p:sp>
+      <p:sp>
+        <p:nvSpPr>
+          <p:cNvPr id="10" name="矢印: 右 9">
+            <a:extLst>
+              <a:ext uri="{FF2B5EF4-FFF2-40B4-BE49-F238E27FC236}">
+                <a16:creationId xmlns:a16="http://schemas.microsoft.com/office/drawing/2014/main" id="{40DEC0B1-BBA1-4501-851E-154385FDC737}"/>
+              </a:ext>
+            </a:extLst>
+          </p:cNvPr>
+          <p:cNvSpPr/>
+          <p:nvPr/>
+        </p:nvSpPr>
+        <p:spPr>
+          <a:xfrm>
+            <a:off x="4569366" y="3063243"/>
+            <a:ext cx="1603575" cy="731513"/>
+          </a:xfrm>
+          <a:prstGeom prst="rightArrow">
+            <a:avLst/>
+          </a:prstGeom>
         </p:spPr>
         <p:style>
           <a:lnRef idx="2">
@@ -4235,14 +5135,253 @@
           <a:lstStyle/>
           <a:p>
             <a:pPr algn="ctr"/>
-            <a:endParaRPr kumimoji="1" lang="ja-JP" altLang="en-US"/>
+            <a:endParaRPr kumimoji="1" lang="ja-JP" altLang="en-US" b="1" dirty="0"/>
+          </a:p>
+        </p:txBody>
+      </p:sp>
+      <p:sp>
+        <p:nvSpPr>
+          <p:cNvPr id="11" name="テキスト ボックス 10">
+            <a:extLst>
+              <a:ext uri="{FF2B5EF4-FFF2-40B4-BE49-F238E27FC236}">
+                <a16:creationId xmlns:a16="http://schemas.microsoft.com/office/drawing/2014/main" id="{6AF6FE5D-ABB5-43B9-BD0F-6264748AFC32}"/>
+              </a:ext>
+            </a:extLst>
+          </p:cNvPr>
+          <p:cNvSpPr txBox="1"/>
+          <p:nvPr/>
+        </p:nvSpPr>
+        <p:spPr>
+          <a:xfrm>
+            <a:off x="495824" y="5806260"/>
+            <a:ext cx="7252306" cy="461665"/>
+          </a:xfrm>
+          <a:prstGeom prst="rect">
+            <a:avLst/>
+          </a:prstGeom>
+          <a:noFill/>
+        </p:spPr>
+        <p:txBody>
+          <a:bodyPr wrap="none" rtlCol="0">
+            <a:spAutoFit/>
+          </a:bodyPr>
+          <a:lstStyle/>
+          <a:p>
+            <a:r>
+              <a:rPr lang="en-US" altLang="ja-JP" sz="2400" b="1" dirty="0">
+                <a:solidFill>
+                  <a:srgbClr val="FF0000"/>
+                </a:solidFill>
+              </a:rPr>
+              <a:t>※</a:t>
+            </a:r>
+            <a:r>
+              <a:rPr lang="ja-JP" altLang="en-US" sz="2400" b="1" dirty="0">
+                <a:solidFill>
+                  <a:srgbClr val="FF0000"/>
+                </a:solidFill>
+              </a:rPr>
+              <a:t>時間があれば別席の人の</a:t>
+            </a:r>
+            <a:r>
+              <a:rPr lang="en-US" altLang="ja-JP" sz="2400" b="1" dirty="0">
+                <a:solidFill>
+                  <a:srgbClr val="FF0000"/>
+                </a:solidFill>
+              </a:rPr>
+              <a:t>Server</a:t>
+            </a:r>
+            <a:r>
+              <a:rPr lang="ja-JP" altLang="en-US" sz="2400" b="1" dirty="0">
+                <a:solidFill>
+                  <a:srgbClr val="FF0000"/>
+                </a:solidFill>
+              </a:rPr>
+              <a:t>にも送ってみよう</a:t>
+            </a:r>
+            <a:endParaRPr kumimoji="1" lang="en-US" altLang="ja-JP" sz="2400" b="1" dirty="0">
+              <a:solidFill>
+                <a:srgbClr val="FF0000"/>
+              </a:solidFill>
+            </a:endParaRPr>
           </a:p>
         </p:txBody>
       </p:sp>
     </p:spTree>
     <p:extLst>
       <p:ext uri="{BB962C8B-B14F-4D97-AF65-F5344CB8AC3E}">
-        <p14:creationId xmlns:p14="http://schemas.microsoft.com/office/powerpoint/2010/main" val="1379912275"/>
+        <p14:creationId xmlns:p14="http://schemas.microsoft.com/office/powerpoint/2010/main" val="3066502511"/>
+      </p:ext>
+    </p:extLst>
+  </p:cSld>
+  <p:clrMapOvr>
+    <a:masterClrMapping/>
+  </p:clrMapOvr>
+</p:sld>
+</file>
+
+<file path=ppt/slides/slide15.xml><?xml version="1.0" encoding="utf-8"?>
+<p:sld xmlns:a="http://schemas.openxmlformats.org/drawingml/2006/main" xmlns:r="http://schemas.openxmlformats.org/officeDocument/2006/relationships" xmlns:p="http://schemas.openxmlformats.org/presentationml/2006/main">
+  <p:cSld>
+    <p:spTree>
+      <p:nvGrpSpPr>
+        <p:cNvPr id="1" name=""/>
+        <p:cNvGrpSpPr/>
+        <p:nvPr/>
+      </p:nvGrpSpPr>
+      <p:grpSpPr>
+        <a:xfrm>
+          <a:off x="0" y="0"/>
+          <a:ext cx="0" cy="0"/>
+          <a:chOff x="0" y="0"/>
+          <a:chExt cx="0" cy="0"/>
+        </a:xfrm>
+      </p:grpSpPr>
+      <p:sp>
+        <p:nvSpPr>
+          <p:cNvPr id="4" name="テキスト ボックス 3">
+            <a:extLst>
+              <a:ext uri="{FF2B5EF4-FFF2-40B4-BE49-F238E27FC236}">
+                <a16:creationId xmlns:a16="http://schemas.microsoft.com/office/drawing/2014/main" id="{5A13BF46-B8C5-48AA-8308-C9ECFF431A18}"/>
+              </a:ext>
+            </a:extLst>
+          </p:cNvPr>
+          <p:cNvSpPr txBox="1"/>
+          <p:nvPr/>
+        </p:nvSpPr>
+        <p:spPr>
+          <a:xfrm>
+            <a:off x="567542" y="491954"/>
+            <a:ext cx="3995004" cy="584775"/>
+          </a:xfrm>
+          <a:prstGeom prst="rect">
+            <a:avLst/>
+          </a:prstGeom>
+          <a:noFill/>
+        </p:spPr>
+        <p:txBody>
+          <a:bodyPr wrap="none" rtlCol="0">
+            <a:spAutoFit/>
+          </a:bodyPr>
+          <a:lstStyle/>
+          <a:p>
+            <a:r>
+              <a:rPr kumimoji="1" lang="ja-JP" altLang="en-US" sz="3200" b="1" u="sng" dirty="0"/>
+              <a:t>データの送受信 補足</a:t>
+            </a:r>
+          </a:p>
+        </p:txBody>
+      </p:sp>
+      <p:sp>
+        <p:nvSpPr>
+          <p:cNvPr id="6" name="テキスト ボックス 5">
+            <a:extLst>
+              <a:ext uri="{FF2B5EF4-FFF2-40B4-BE49-F238E27FC236}">
+                <a16:creationId xmlns:a16="http://schemas.microsoft.com/office/drawing/2014/main" id="{55830AD6-028B-4C4E-80BF-B70DFC1C3A46}"/>
+              </a:ext>
+            </a:extLst>
+          </p:cNvPr>
+          <p:cNvSpPr txBox="1"/>
+          <p:nvPr/>
+        </p:nvSpPr>
+        <p:spPr>
+          <a:xfrm>
+            <a:off x="567542" y="1216429"/>
+            <a:ext cx="8802410" cy="2677656"/>
+          </a:xfrm>
+          <a:prstGeom prst="rect">
+            <a:avLst/>
+          </a:prstGeom>
+          <a:noFill/>
+        </p:spPr>
+        <p:txBody>
+          <a:bodyPr wrap="none" rtlCol="0">
+            <a:spAutoFit/>
+          </a:bodyPr>
+          <a:lstStyle/>
+          <a:p>
+            <a:r>
+              <a:rPr lang="ja-JP" altLang="en-US" sz="2400" dirty="0"/>
+              <a:t>一見、これでチャットの完成と思うかもしれませんが、</a:t>
+            </a:r>
+            <a:endParaRPr lang="en-US" altLang="ja-JP" sz="2400" dirty="0"/>
+          </a:p>
+          <a:p>
+            <a:r>
+              <a:rPr kumimoji="1" lang="ja-JP" altLang="en-US" sz="2400" dirty="0"/>
+              <a:t>今回は</a:t>
+            </a:r>
+            <a:r>
+              <a:rPr kumimoji="1" lang="en-US" altLang="ja-JP" sz="2400" b="1" dirty="0">
+                <a:solidFill>
+                  <a:srgbClr val="00B050"/>
+                </a:solidFill>
+              </a:rPr>
+              <a:t>Server</a:t>
+            </a:r>
+            <a:r>
+              <a:rPr kumimoji="1" lang="ja-JP" altLang="en-US" sz="2400" dirty="0"/>
+              <a:t>に向かってデータを送っているだけです。</a:t>
+            </a:r>
+            <a:endParaRPr kumimoji="1" lang="en-US" altLang="ja-JP" sz="2400" dirty="0"/>
+          </a:p>
+          <a:p>
+            <a:endParaRPr lang="en-US" altLang="ja-JP" sz="2400" dirty="0"/>
+          </a:p>
+          <a:p>
+            <a:r>
+              <a:rPr kumimoji="1" lang="ja-JP" altLang="en-US" sz="2400" dirty="0"/>
+              <a:t>実際、</a:t>
+            </a:r>
+            <a:r>
+              <a:rPr kumimoji="1" lang="ja-JP" altLang="en-US" sz="2400" b="1" dirty="0">
+                <a:solidFill>
+                  <a:srgbClr val="FF0000"/>
+                </a:solidFill>
+              </a:rPr>
+              <a:t>ゲームのプレイヤーはクライアントを操作</a:t>
+            </a:r>
+            <a:r>
+              <a:rPr kumimoji="1" lang="ja-JP" altLang="en-US" sz="2400" dirty="0"/>
+              <a:t>するので、</a:t>
+            </a:r>
+            <a:endParaRPr kumimoji="1" lang="en-US" altLang="ja-JP" sz="2400" dirty="0"/>
+          </a:p>
+          <a:p>
+            <a:r>
+              <a:rPr lang="ja-JP" altLang="en-US" sz="2400" b="1" dirty="0">
+                <a:solidFill>
+                  <a:srgbClr val="FF0000"/>
+                </a:solidFill>
+              </a:rPr>
+              <a:t>クライアント側にもメッセージを反映</a:t>
+            </a:r>
+            <a:r>
+              <a:rPr lang="ja-JP" altLang="en-US" sz="2400" dirty="0"/>
+              <a:t>させる必要があります。</a:t>
+            </a:r>
+            <a:endParaRPr lang="en-US" altLang="ja-JP" sz="2400" dirty="0"/>
+          </a:p>
+          <a:p>
+            <a:endParaRPr kumimoji="1" lang="en-US" altLang="ja-JP" sz="2400" dirty="0"/>
+          </a:p>
+          <a:p>
+            <a:r>
+              <a:rPr kumimoji="1" lang="en-US" altLang="ja-JP" sz="2400" dirty="0"/>
+              <a:t>※</a:t>
+            </a:r>
+            <a:r>
+              <a:rPr kumimoji="1" lang="ja-JP" altLang="en-US" sz="2400" dirty="0"/>
+              <a:t>詳細については次回</a:t>
+            </a:r>
+            <a:endParaRPr kumimoji="1" lang="en-US" altLang="ja-JP" sz="2400" dirty="0"/>
+          </a:p>
+        </p:txBody>
+      </p:sp>
+    </p:spTree>
+    <p:extLst>
+      <p:ext uri="{BB962C8B-B14F-4D97-AF65-F5344CB8AC3E}">
+        <p14:creationId xmlns:p14="http://schemas.microsoft.com/office/powerpoint/2010/main" val="1678360910"/>
       </p:ext>
     </p:extLst>
   </p:cSld>
@@ -5617,7 +6756,7 @@
         <p:spPr>
           <a:xfrm>
             <a:off x="567542" y="1216429"/>
-            <a:ext cx="6694461" cy="461665"/>
+            <a:ext cx="10724411" cy="461665"/>
           </a:xfrm>
           <a:prstGeom prst="rect">
             <a:avLst/>
@@ -5631,28 +6770,24 @@
           <a:lstStyle/>
           <a:p>
             <a:r>
-              <a:rPr lang="ja-JP" altLang="en-US" sz="2400" dirty="0"/>
-              <a:t>つづいて</a:t>
-            </a:r>
-            <a:r>
-              <a:rPr lang="en-US" altLang="ja-JP" sz="2400" b="1" dirty="0">
+              <a:rPr kumimoji="1" lang="en-US" altLang="ja-JP" sz="2400" b="1" dirty="0" err="1">
                 <a:solidFill>
-                  <a:srgbClr val="7030A0"/>
+                  <a:srgbClr val="FF0000"/>
                 </a:solidFill>
               </a:rPr>
-              <a:t>Server</a:t>
-            </a:r>
-            <a:r>
-              <a:rPr lang="ja-JP" altLang="en-US" sz="2400" b="1" dirty="0">
-                <a:solidFill>
-                  <a:srgbClr val="7030A0"/>
-                </a:solidFill>
-              </a:rPr>
-              <a:t>プロジェクト</a:t>
+              <a:t>NetworkCommonParam.h</a:t>
             </a:r>
             <a:r>
               <a:rPr lang="ja-JP" altLang="en-US" sz="2400" dirty="0"/>
-              <a:t>を開きましょう。</a:t>
+              <a:t>に</a:t>
+            </a:r>
+            <a:r>
+              <a:rPr lang="en-US" altLang="ja-JP" sz="2400" dirty="0"/>
+              <a:t>Client</a:t>
+            </a:r>
+            <a:r>
+              <a:rPr lang="ja-JP" altLang="en-US" sz="2400" dirty="0"/>
+              <a:t>で追加したデータをコピーしましょう。</a:t>
             </a:r>
             <a:endParaRPr kumimoji="1" lang="en-US" altLang="ja-JP" sz="2400" dirty="0"/>
           </a:p>
@@ -5663,7 +6798,7 @@
           <p:cNvPr id="5" name="図 4">
             <a:extLst>
               <a:ext uri="{FF2B5EF4-FFF2-40B4-BE49-F238E27FC236}">
-                <a16:creationId xmlns:a16="http://schemas.microsoft.com/office/drawing/2014/main" id="{6E8773F9-30EC-4F44-A601-6D2F998C130B}"/>
+                <a16:creationId xmlns:a16="http://schemas.microsoft.com/office/drawing/2014/main" id="{3F671132-E53D-4471-B17E-1CF66C4E123F}"/>
               </a:ext>
             </a:extLst>
           </p:cNvPr>
@@ -5680,8 +6815,8 @@
         </p:blipFill>
         <p:spPr>
           <a:xfrm>
-            <a:off x="567542" y="1817794"/>
-            <a:ext cx="8407125" cy="4518830"/>
+            <a:off x="567542" y="2187126"/>
+            <a:ext cx="8002932" cy="2994474"/>
           </a:xfrm>
           <a:prstGeom prst="rect">
             <a:avLst/>
@@ -5691,7 +6826,7 @@
     </p:spTree>
     <p:extLst>
       <p:ext uri="{BB962C8B-B14F-4D97-AF65-F5344CB8AC3E}">
-        <p14:creationId xmlns:p14="http://schemas.microsoft.com/office/powerpoint/2010/main" val="1460932794"/>
+        <p14:creationId xmlns:p14="http://schemas.microsoft.com/office/powerpoint/2010/main" val="1656401941"/>
       </p:ext>
     </p:extLst>
   </p:cSld>
@@ -5768,7 +6903,7 @@
         <p:spPr>
           <a:xfrm>
             <a:off x="567542" y="1216429"/>
-            <a:ext cx="10724411" cy="461665"/>
+            <a:ext cx="11574002" cy="461665"/>
           </a:xfrm>
           <a:prstGeom prst="rect">
             <a:avLst/>
@@ -5781,25 +6916,49 @@
           </a:bodyPr>
           <a:lstStyle/>
           <a:p>
+            <a:r>
+              <a:rPr kumimoji="1" lang="en-US" altLang="ja-JP" sz="2400" b="1" dirty="0">
+                <a:solidFill>
+                  <a:srgbClr val="00B050"/>
+                </a:solidFill>
+              </a:rPr>
+              <a:t>Server</a:t>
+            </a:r>
+            <a:r>
+              <a:rPr kumimoji="1" lang="ja-JP" altLang="en-US" sz="2400" b="1" dirty="0">
+                <a:solidFill>
+                  <a:srgbClr val="00B050"/>
+                </a:solidFill>
+              </a:rPr>
+              <a:t>クラス</a:t>
+            </a:r>
+            <a:r>
+              <a:rPr kumimoji="1" lang="en-US" altLang="ja-JP" sz="2400" b="1" dirty="0">
+                <a:solidFill>
+                  <a:srgbClr val="FF0000"/>
+                </a:solidFill>
+              </a:rPr>
+              <a:t>(</a:t>
+            </a:r>
             <a:r>
               <a:rPr kumimoji="1" lang="en-US" altLang="ja-JP" sz="2400" b="1" dirty="0" err="1">
                 <a:solidFill>
                   <a:srgbClr val="FF0000"/>
                 </a:solidFill>
               </a:rPr>
-              <a:t>NetworkCommonParam.h</a:t>
-            </a:r>
-            <a:r>
-              <a:rPr lang="ja-JP" altLang="en-US" sz="2400" dirty="0"/>
-              <a:t>に</a:t>
-            </a:r>
-            <a:r>
-              <a:rPr lang="en-US" altLang="ja-JP" sz="2400" dirty="0"/>
-              <a:t>Client</a:t>
-            </a:r>
-            <a:r>
-              <a:rPr lang="ja-JP" altLang="en-US" sz="2400" dirty="0"/>
-              <a:t>で追加したデータをコピーしましょう。</a:t>
+              <a:t>Server.h</a:t>
+            </a:r>
+            <a:r>
+              <a:rPr kumimoji="1" lang="en-US" altLang="ja-JP" sz="2400" b="1" dirty="0">
+                <a:solidFill>
+                  <a:srgbClr val="FF0000"/>
+                </a:solidFill>
+              </a:rPr>
+              <a:t>)</a:t>
+            </a:r>
+            <a:r>
+              <a:rPr kumimoji="1" lang="ja-JP" altLang="en-US" sz="2400" dirty="0"/>
+              <a:t>に受信したチャットデータ用のメンバ変数を追加します。</a:t>
             </a:r>
             <a:endParaRPr kumimoji="1" lang="en-US" altLang="ja-JP" sz="2400" dirty="0"/>
           </a:p>
@@ -5807,10 +6966,10 @@
       </p:sp>
       <p:pic>
         <p:nvPicPr>
-          <p:cNvPr id="5" name="図 4">
-            <a:extLst>
-              <a:ext uri="{FF2B5EF4-FFF2-40B4-BE49-F238E27FC236}">
-                <a16:creationId xmlns:a16="http://schemas.microsoft.com/office/drawing/2014/main" id="{3F671132-E53D-4471-B17E-1CF66C4E123F}"/>
+          <p:cNvPr id="3" name="図 2">
+            <a:extLst>
+              <a:ext uri="{FF2B5EF4-FFF2-40B4-BE49-F238E27FC236}">
+                <a16:creationId xmlns:a16="http://schemas.microsoft.com/office/drawing/2014/main" id="{396AE614-71E3-49C3-A211-7B2F3F8FCFC5}"/>
               </a:ext>
             </a:extLst>
           </p:cNvPr>
@@ -5827,18 +6986,70 @@
         </p:blipFill>
         <p:spPr>
           <a:xfrm>
-            <a:off x="567542" y="2187126"/>
-            <a:ext cx="8002932" cy="2994474"/>
+            <a:off x="567542" y="1817793"/>
+            <a:ext cx="6625042" cy="1721273"/>
           </a:xfrm>
           <a:prstGeom prst="rect">
             <a:avLst/>
           </a:prstGeom>
         </p:spPr>
       </p:pic>
+      <p:sp>
+        <p:nvSpPr>
+          <p:cNvPr id="7" name="正方形/長方形 6">
+            <a:extLst>
+              <a:ext uri="{FF2B5EF4-FFF2-40B4-BE49-F238E27FC236}">
+                <a16:creationId xmlns:a16="http://schemas.microsoft.com/office/drawing/2014/main" id="{24D0C94B-8829-428D-A84D-4C88649CCEF2}"/>
+              </a:ext>
+            </a:extLst>
+          </p:cNvPr>
+          <p:cNvSpPr/>
+          <p:nvPr/>
+        </p:nvSpPr>
+        <p:spPr>
+          <a:xfrm>
+            <a:off x="2531534" y="2345266"/>
+            <a:ext cx="4661050" cy="618067"/>
+          </a:xfrm>
+          <a:prstGeom prst="rect">
+            <a:avLst/>
+          </a:prstGeom>
+          <a:noFill/>
+          <a:ln w="38100">
+            <a:solidFill>
+              <a:srgbClr val="FF0000"/>
+            </a:solidFill>
+          </a:ln>
+        </p:spPr>
+        <p:style>
+          <a:lnRef idx="2">
+            <a:schemeClr val="accent1">
+              <a:shade val="50000"/>
+            </a:schemeClr>
+          </a:lnRef>
+          <a:fillRef idx="1">
+            <a:schemeClr val="accent1"/>
+          </a:fillRef>
+          <a:effectRef idx="0">
+            <a:schemeClr val="accent1"/>
+          </a:effectRef>
+          <a:fontRef idx="minor">
+            <a:schemeClr val="lt1"/>
+          </a:fontRef>
+        </p:style>
+        <p:txBody>
+          <a:bodyPr rtlCol="0" anchor="ctr"/>
+          <a:lstStyle/>
+          <a:p>
+            <a:pPr algn="ctr"/>
+            <a:endParaRPr kumimoji="1" lang="ja-JP" altLang="en-US"/>
+          </a:p>
+        </p:txBody>
+      </p:sp>
     </p:spTree>
     <p:extLst>
       <p:ext uri="{BB962C8B-B14F-4D97-AF65-F5344CB8AC3E}">
-        <p14:creationId xmlns:p14="http://schemas.microsoft.com/office/powerpoint/2010/main" val="1656401941"/>
+        <p14:creationId xmlns:p14="http://schemas.microsoft.com/office/powerpoint/2010/main" val="1379912275"/>
       </p:ext>
     </p:extLst>
   </p:cSld>

--- a/ゲーム科3年/00_前期/オンラインゲームプログラミングⅠ/02_データの送受信.pptx
+++ b/ゲーム科3年/00_前期/オンラインゲームプログラミングⅠ/02_データの送受信.pptx
@@ -12,11 +12,11 @@
     <p:sldId id="260" r:id="rId6"/>
     <p:sldId id="261" r:id="rId7"/>
     <p:sldId id="262" r:id="rId8"/>
-    <p:sldId id="264" r:id="rId9"/>
-    <p:sldId id="265" r:id="rId10"/>
-    <p:sldId id="266" r:id="rId11"/>
-    <p:sldId id="267" r:id="rId12"/>
-    <p:sldId id="263" r:id="rId13"/>
+    <p:sldId id="263" r:id="rId9"/>
+    <p:sldId id="264" r:id="rId10"/>
+    <p:sldId id="265" r:id="rId11"/>
+    <p:sldId id="266" r:id="rId12"/>
+    <p:sldId id="267" r:id="rId13"/>
     <p:sldId id="268" r:id="rId14"/>
     <p:sldId id="270" r:id="rId15"/>
     <p:sldId id="269" r:id="rId16"/>
@@ -273,7 +273,7 @@
           <a:p>
             <a:fld id="{E9CC885B-4903-4D54-9A93-00025F12DED9}" type="datetimeFigureOut">
               <a:rPr kumimoji="1" lang="ja-JP" altLang="en-US" smtClean="0"/>
-              <a:t>2025/10/7</a:t>
+              <a:t>2025/10/30</a:t>
             </a:fld>
             <a:endParaRPr kumimoji="1" lang="ja-JP" altLang="en-US"/>
           </a:p>
@@ -503,7 +503,7 @@
           <a:p>
             <a:fld id="{E9CC885B-4903-4D54-9A93-00025F12DED9}" type="datetimeFigureOut">
               <a:rPr kumimoji="1" lang="ja-JP" altLang="en-US" smtClean="0"/>
-              <a:t>2025/10/7</a:t>
+              <a:t>2025/10/30</a:t>
             </a:fld>
             <a:endParaRPr kumimoji="1" lang="ja-JP" altLang="en-US"/>
           </a:p>
@@ -743,7 +743,7 @@
           <a:p>
             <a:fld id="{E9CC885B-4903-4D54-9A93-00025F12DED9}" type="datetimeFigureOut">
               <a:rPr kumimoji="1" lang="ja-JP" altLang="en-US" smtClean="0"/>
-              <a:t>2025/10/7</a:t>
+              <a:t>2025/10/30</a:t>
             </a:fld>
             <a:endParaRPr kumimoji="1" lang="ja-JP" altLang="en-US"/>
           </a:p>
@@ -973,7 +973,7 @@
           <a:p>
             <a:fld id="{E9CC885B-4903-4D54-9A93-00025F12DED9}" type="datetimeFigureOut">
               <a:rPr kumimoji="1" lang="ja-JP" altLang="en-US" smtClean="0"/>
-              <a:t>2025/10/7</a:t>
+              <a:t>2025/10/30</a:t>
             </a:fld>
             <a:endParaRPr kumimoji="1" lang="ja-JP" altLang="en-US"/>
           </a:p>
@@ -1248,7 +1248,7 @@
           <a:p>
             <a:fld id="{E9CC885B-4903-4D54-9A93-00025F12DED9}" type="datetimeFigureOut">
               <a:rPr kumimoji="1" lang="ja-JP" altLang="en-US" smtClean="0"/>
-              <a:t>2025/10/7</a:t>
+              <a:t>2025/10/30</a:t>
             </a:fld>
             <a:endParaRPr kumimoji="1" lang="ja-JP" altLang="en-US"/>
           </a:p>
@@ -1577,7 +1577,7 @@
           <a:p>
             <a:fld id="{E9CC885B-4903-4D54-9A93-00025F12DED9}" type="datetimeFigureOut">
               <a:rPr kumimoji="1" lang="ja-JP" altLang="en-US" smtClean="0"/>
-              <a:t>2025/10/7</a:t>
+              <a:t>2025/10/30</a:t>
             </a:fld>
             <a:endParaRPr kumimoji="1" lang="ja-JP" altLang="en-US"/>
           </a:p>
@@ -2053,7 +2053,7 @@
           <a:p>
             <a:fld id="{E9CC885B-4903-4D54-9A93-00025F12DED9}" type="datetimeFigureOut">
               <a:rPr kumimoji="1" lang="ja-JP" altLang="en-US" smtClean="0"/>
-              <a:t>2025/10/7</a:t>
+              <a:t>2025/10/30</a:t>
             </a:fld>
             <a:endParaRPr kumimoji="1" lang="ja-JP" altLang="en-US"/>
           </a:p>
@@ -2194,7 +2194,7 @@
           <a:p>
             <a:fld id="{E9CC885B-4903-4D54-9A93-00025F12DED9}" type="datetimeFigureOut">
               <a:rPr kumimoji="1" lang="ja-JP" altLang="en-US" smtClean="0"/>
-              <a:t>2025/10/7</a:t>
+              <a:t>2025/10/30</a:t>
             </a:fld>
             <a:endParaRPr kumimoji="1" lang="ja-JP" altLang="en-US"/>
           </a:p>
@@ -2307,7 +2307,7 @@
           <a:p>
             <a:fld id="{E9CC885B-4903-4D54-9A93-00025F12DED9}" type="datetimeFigureOut">
               <a:rPr kumimoji="1" lang="ja-JP" altLang="en-US" smtClean="0"/>
-              <a:t>2025/10/7</a:t>
+              <a:t>2025/10/30</a:t>
             </a:fld>
             <a:endParaRPr kumimoji="1" lang="ja-JP" altLang="en-US"/>
           </a:p>
@@ -2650,7 +2650,7 @@
           <a:p>
             <a:fld id="{E9CC885B-4903-4D54-9A93-00025F12DED9}" type="datetimeFigureOut">
               <a:rPr kumimoji="1" lang="ja-JP" altLang="en-US" smtClean="0"/>
-              <a:t>2025/10/7</a:t>
+              <a:t>2025/10/30</a:t>
             </a:fld>
             <a:endParaRPr kumimoji="1" lang="ja-JP" altLang="en-US"/>
           </a:p>
@@ -2938,7 +2938,7 @@
           <a:p>
             <a:fld id="{E9CC885B-4903-4D54-9A93-00025F12DED9}" type="datetimeFigureOut">
               <a:rPr kumimoji="1" lang="ja-JP" altLang="en-US" smtClean="0"/>
-              <a:t>2025/10/7</a:t>
+              <a:t>2025/10/30</a:t>
             </a:fld>
             <a:endParaRPr kumimoji="1" lang="ja-JP" altLang="en-US"/>
           </a:p>
@@ -3211,7 +3211,7 @@
           <a:p>
             <a:fld id="{E9CC885B-4903-4D54-9A93-00025F12DED9}" type="datetimeFigureOut">
               <a:rPr kumimoji="1" lang="ja-JP" altLang="en-US" smtClean="0"/>
-              <a:t>2025/10/7</a:t>
+              <a:t>2025/10/30</a:t>
             </a:fld>
             <a:endParaRPr kumimoji="1" lang="ja-JP" altLang="en-US"/>
           </a:p>
@@ -4101,7 +4101,7 @@
         <p:spPr>
           <a:xfrm>
             <a:off x="567542" y="1216429"/>
-            <a:ext cx="9289723" cy="461665"/>
+            <a:ext cx="11574002" cy="461665"/>
           </a:xfrm>
           <a:prstGeom prst="rect">
             <a:avLst/>
@@ -4115,36 +4115,48 @@
           <a:lstStyle/>
           <a:p>
             <a:r>
+              <a:rPr kumimoji="1" lang="en-US" altLang="ja-JP" sz="2400" b="1" dirty="0">
+                <a:solidFill>
+                  <a:srgbClr val="00B050"/>
+                </a:solidFill>
+              </a:rPr>
+              <a:t>Server</a:t>
+            </a:r>
+            <a:r>
               <a:rPr kumimoji="1" lang="ja-JP" altLang="en-US" sz="2400" b="1" dirty="0">
                 <a:solidFill>
-                  <a:srgbClr val="0070C0"/>
+                  <a:srgbClr val="00B050"/>
                 </a:solidFill>
               </a:rPr>
-              <a:t>コンストラクタ</a:t>
-            </a:r>
-            <a:r>
-              <a:rPr kumimoji="1" lang="ja-JP" altLang="en-US" sz="2400" dirty="0"/>
-              <a:t>で初期化し、</a:t>
+              <a:t>クラス</a:t>
             </a:r>
             <a:r>
               <a:rPr kumimoji="1" lang="en-US" altLang="ja-JP" sz="2400" b="1" dirty="0">
                 <a:solidFill>
-                  <a:srgbClr val="0070C0"/>
+                  <a:srgbClr val="FF0000"/>
                 </a:solidFill>
               </a:rPr>
-              <a:t>Draw</a:t>
-            </a:r>
-            <a:r>
-              <a:rPr kumimoji="1" lang="ja-JP" altLang="en-US" sz="2400" b="1" dirty="0">
+              <a:t>(</a:t>
+            </a:r>
+            <a:r>
+              <a:rPr kumimoji="1" lang="en-US" altLang="ja-JP" sz="2400" b="1" dirty="0" err="1">
                 <a:solidFill>
-                  <a:srgbClr val="0070C0"/>
+                  <a:srgbClr val="FF0000"/>
                 </a:solidFill>
               </a:rPr>
-              <a:t>関数</a:t>
+              <a:t>Server.h</a:t>
+            </a:r>
+            <a:r>
+              <a:rPr kumimoji="1" lang="en-US" altLang="ja-JP" sz="2400" b="1" dirty="0">
+                <a:solidFill>
+                  <a:srgbClr val="FF0000"/>
+                </a:solidFill>
+              </a:rPr>
+              <a:t>)</a:t>
             </a:r>
             <a:r>
               <a:rPr kumimoji="1" lang="ja-JP" altLang="en-US" sz="2400" dirty="0"/>
-              <a:t>で内容を描画しましょう。</a:t>
+              <a:t>に受信したチャットデータ用のメンバ変数を追加します。</a:t>
             </a:r>
             <a:endParaRPr kumimoji="1" lang="en-US" altLang="ja-JP" sz="2400" dirty="0"/>
           </a:p>
@@ -4152,10 +4164,10 @@
       </p:sp>
       <p:pic>
         <p:nvPicPr>
-          <p:cNvPr id="5" name="図 4">
-            <a:extLst>
-              <a:ext uri="{FF2B5EF4-FFF2-40B4-BE49-F238E27FC236}">
-                <a16:creationId xmlns:a16="http://schemas.microsoft.com/office/drawing/2014/main" id="{EC6F0724-9E0B-42EA-A7B6-0F084C1FE3C7}"/>
+          <p:cNvPr id="3" name="図 2">
+            <a:extLst>
+              <a:ext uri="{FF2B5EF4-FFF2-40B4-BE49-F238E27FC236}">
+                <a16:creationId xmlns:a16="http://schemas.microsoft.com/office/drawing/2014/main" id="{396AE614-71E3-49C3-A211-7B2F3F8FCFC5}"/>
               </a:ext>
             </a:extLst>
           </p:cNvPr>
@@ -4172,48 +4184,70 @@
         </p:blipFill>
         <p:spPr>
           <a:xfrm>
-            <a:off x="567542" y="1817794"/>
-            <a:ext cx="3467584" cy="1124107"/>
+            <a:off x="567542" y="1817793"/>
+            <a:ext cx="6625042" cy="1721273"/>
           </a:xfrm>
           <a:prstGeom prst="rect">
             <a:avLst/>
           </a:prstGeom>
         </p:spPr>
       </p:pic>
-      <p:pic>
-        <p:nvPicPr>
-          <p:cNvPr id="9" name="図 8">
-            <a:extLst>
-              <a:ext uri="{FF2B5EF4-FFF2-40B4-BE49-F238E27FC236}">
-                <a16:creationId xmlns:a16="http://schemas.microsoft.com/office/drawing/2014/main" id="{6A6E07F4-2E20-4AFB-B4B0-01FAFA0A1473}"/>
-              </a:ext>
-            </a:extLst>
-          </p:cNvPr>
-          <p:cNvPicPr>
-            <a:picLocks noChangeAspect="1"/>
-          </p:cNvPicPr>
+      <p:sp>
+        <p:nvSpPr>
+          <p:cNvPr id="7" name="正方形/長方形 6">
+            <a:extLst>
+              <a:ext uri="{FF2B5EF4-FFF2-40B4-BE49-F238E27FC236}">
+                <a16:creationId xmlns:a16="http://schemas.microsoft.com/office/drawing/2014/main" id="{24D0C94B-8829-428D-A84D-4C88649CCEF2}"/>
+              </a:ext>
+            </a:extLst>
+          </p:cNvPr>
+          <p:cNvSpPr/>
           <p:nvPr/>
-        </p:nvPicPr>
-        <p:blipFill>
-          <a:blip r:embed="rId3"/>
-          <a:stretch>
-            <a:fillRect/>
-          </a:stretch>
-        </p:blipFill>
-        <p:spPr>
-          <a:xfrm>
-            <a:off x="567542" y="3426742"/>
-            <a:ext cx="9211961" cy="2419688"/>
+        </p:nvSpPr>
+        <p:spPr>
+          <a:xfrm>
+            <a:off x="2531534" y="2345266"/>
+            <a:ext cx="4661050" cy="618067"/>
           </a:xfrm>
           <a:prstGeom prst="rect">
             <a:avLst/>
           </a:prstGeom>
-        </p:spPr>
-      </p:pic>
+          <a:noFill/>
+          <a:ln w="38100">
+            <a:solidFill>
+              <a:srgbClr val="FF0000"/>
+            </a:solidFill>
+          </a:ln>
+        </p:spPr>
+        <p:style>
+          <a:lnRef idx="2">
+            <a:schemeClr val="accent1">
+              <a:shade val="50000"/>
+            </a:schemeClr>
+          </a:lnRef>
+          <a:fillRef idx="1">
+            <a:schemeClr val="accent1"/>
+          </a:fillRef>
+          <a:effectRef idx="0">
+            <a:schemeClr val="accent1"/>
+          </a:effectRef>
+          <a:fontRef idx="minor">
+            <a:schemeClr val="lt1"/>
+          </a:fontRef>
+        </p:style>
+        <p:txBody>
+          <a:bodyPr rtlCol="0" anchor="ctr"/>
+          <a:lstStyle/>
+          <a:p>
+            <a:pPr algn="ctr"/>
+            <a:endParaRPr kumimoji="1" lang="ja-JP" altLang="en-US"/>
+          </a:p>
+        </p:txBody>
+      </p:sp>
     </p:spTree>
     <p:extLst>
       <p:ext uri="{BB962C8B-B14F-4D97-AF65-F5344CB8AC3E}">
-        <p14:creationId xmlns:p14="http://schemas.microsoft.com/office/powerpoint/2010/main" val="889169730"/>
+        <p14:creationId xmlns:p14="http://schemas.microsoft.com/office/powerpoint/2010/main" val="1379912275"/>
       </p:ext>
     </p:extLst>
   </p:cSld>
@@ -4290,7 +4324,7 @@
         <p:spPr>
           <a:xfrm>
             <a:off x="567542" y="1216429"/>
-            <a:ext cx="6386685" cy="461665"/>
+            <a:ext cx="9289723" cy="461665"/>
           </a:xfrm>
           <a:prstGeom prst="rect">
             <a:avLst/>
@@ -4304,15 +4338,27 @@
           <a:lstStyle/>
           <a:p>
             <a:r>
-              <a:rPr lang="en-US" altLang="ja-JP" sz="2400" b="1" dirty="0" err="1">
+              <a:rPr kumimoji="1" lang="ja-JP" altLang="en-US" sz="2400" b="1" dirty="0">
                 <a:solidFill>
                   <a:srgbClr val="0070C0"/>
                 </a:solidFill>
               </a:rPr>
-              <a:t>ReceiveData</a:t>
-            </a:r>
-            <a:r>
-              <a:rPr lang="ja-JP" altLang="en-US" sz="2400" b="1" dirty="0">
+              <a:t>コンストラクタ</a:t>
+            </a:r>
+            <a:r>
+              <a:rPr kumimoji="1" lang="ja-JP" altLang="en-US" sz="2400" dirty="0"/>
+              <a:t>で初期化し、</a:t>
+            </a:r>
+            <a:r>
+              <a:rPr kumimoji="1" lang="en-US" altLang="ja-JP" sz="2400" b="1" dirty="0">
+                <a:solidFill>
+                  <a:srgbClr val="0070C0"/>
+                </a:solidFill>
+              </a:rPr>
+              <a:t>Draw</a:t>
+            </a:r>
+            <a:r>
+              <a:rPr kumimoji="1" lang="ja-JP" altLang="en-US" sz="2400" b="1" dirty="0">
                 <a:solidFill>
                   <a:srgbClr val="0070C0"/>
                 </a:solidFill>
@@ -4320,8 +4366,8 @@
               <a:t>関数</a:t>
             </a:r>
             <a:r>
-              <a:rPr lang="ja-JP" altLang="en-US" sz="2400" dirty="0"/>
-              <a:t>に受信処理を追加します。</a:t>
+              <a:rPr kumimoji="1" lang="ja-JP" altLang="en-US" sz="2400" dirty="0"/>
+              <a:t>で内容を描画しましょう。</a:t>
             </a:r>
             <a:endParaRPr kumimoji="1" lang="en-US" altLang="ja-JP" sz="2400" dirty="0"/>
           </a:p>
@@ -4329,10 +4375,10 @@
       </p:sp>
       <p:pic>
         <p:nvPicPr>
-          <p:cNvPr id="3" name="図 2">
-            <a:extLst>
-              <a:ext uri="{FF2B5EF4-FFF2-40B4-BE49-F238E27FC236}">
-                <a16:creationId xmlns:a16="http://schemas.microsoft.com/office/drawing/2014/main" id="{4A8E5FAE-27F9-4750-A2E4-361B0B7EAED6}"/>
+          <p:cNvPr id="5" name="図 4">
+            <a:extLst>
+              <a:ext uri="{FF2B5EF4-FFF2-40B4-BE49-F238E27FC236}">
+                <a16:creationId xmlns:a16="http://schemas.microsoft.com/office/drawing/2014/main" id="{EC6F0724-9E0B-42EA-A7B6-0F084C1FE3C7}"/>
               </a:ext>
             </a:extLst>
           </p:cNvPr>
@@ -4350,92 +4396,47 @@
         <p:spPr>
           <a:xfrm>
             <a:off x="567542" y="1817794"/>
-            <a:ext cx="8602275" cy="2000529"/>
+            <a:ext cx="3467584" cy="1124107"/>
           </a:xfrm>
           <a:prstGeom prst="rect">
             <a:avLst/>
           </a:prstGeom>
         </p:spPr>
       </p:pic>
-      <p:sp>
-        <p:nvSpPr>
-          <p:cNvPr id="8" name="テキスト ボックス 7">
-            <a:extLst>
-              <a:ext uri="{FF2B5EF4-FFF2-40B4-BE49-F238E27FC236}">
-                <a16:creationId xmlns:a16="http://schemas.microsoft.com/office/drawing/2014/main" id="{BD37E74D-08AD-44F6-97D8-8B7FA0F6750F}"/>
-              </a:ext>
-            </a:extLst>
-          </p:cNvPr>
-          <p:cNvSpPr txBox="1"/>
+      <p:pic>
+        <p:nvPicPr>
+          <p:cNvPr id="9" name="図 8">
+            <a:extLst>
+              <a:ext uri="{FF2B5EF4-FFF2-40B4-BE49-F238E27FC236}">
+                <a16:creationId xmlns:a16="http://schemas.microsoft.com/office/drawing/2014/main" id="{6A6E07F4-2E20-4AFB-B4B0-01FAFA0A1473}"/>
+              </a:ext>
+            </a:extLst>
+          </p:cNvPr>
+          <p:cNvPicPr>
+            <a:picLocks noChangeAspect="1"/>
+          </p:cNvPicPr>
           <p:nvPr/>
-        </p:nvSpPr>
-        <p:spPr>
-          <a:xfrm>
-            <a:off x="567541" y="3973911"/>
-            <a:ext cx="6694461" cy="830997"/>
+        </p:nvPicPr>
+        <p:blipFill>
+          <a:blip r:embed="rId3"/>
+          <a:stretch>
+            <a:fillRect/>
+          </a:stretch>
+        </p:blipFill>
+        <p:spPr>
+          <a:xfrm>
+            <a:off x="567542" y="3426742"/>
+            <a:ext cx="9211961" cy="2419688"/>
           </a:xfrm>
           <a:prstGeom prst="rect">
             <a:avLst/>
           </a:prstGeom>
-          <a:noFill/>
-        </p:spPr>
-        <p:txBody>
-          <a:bodyPr wrap="none" rtlCol="0">
-            <a:spAutoFit/>
-          </a:bodyPr>
-          <a:lstStyle/>
-          <a:p>
-            <a:r>
-              <a:rPr lang="en-US" altLang="ja-JP" sz="2400" b="1" dirty="0" err="1">
-                <a:solidFill>
-                  <a:srgbClr val="0070C0"/>
-                </a:solidFill>
-              </a:rPr>
-              <a:t>ReceiveData</a:t>
-            </a:r>
-            <a:r>
-              <a:rPr lang="ja-JP" altLang="en-US" sz="2400" b="1" dirty="0">
-                <a:solidFill>
-                  <a:srgbClr val="0070C0"/>
-                </a:solidFill>
-              </a:rPr>
-              <a:t>関数</a:t>
-            </a:r>
-            <a:r>
-              <a:rPr lang="ja-JP" altLang="en-US" sz="2400" dirty="0"/>
-              <a:t>は毎フレーム呼び出します。</a:t>
-            </a:r>
-            <a:endParaRPr lang="en-US" altLang="ja-JP" sz="2400" dirty="0"/>
-          </a:p>
-          <a:p>
-            <a:r>
-              <a:rPr kumimoji="1" lang="en-US" altLang="ja-JP" sz="2400" b="1" dirty="0">
-                <a:solidFill>
-                  <a:srgbClr val="0070C0"/>
-                </a:solidFill>
-              </a:rPr>
-              <a:t>Update</a:t>
-            </a:r>
-            <a:r>
-              <a:rPr kumimoji="1" lang="ja-JP" altLang="en-US" sz="2400" b="1" dirty="0">
-                <a:solidFill>
-                  <a:srgbClr val="0070C0"/>
-                </a:solidFill>
-              </a:rPr>
-              <a:t>関数</a:t>
-            </a:r>
-            <a:r>
-              <a:rPr kumimoji="1" lang="ja-JP" altLang="en-US" sz="2400" dirty="0"/>
-              <a:t>を確認しましょう。</a:t>
-            </a:r>
-            <a:endParaRPr kumimoji="1" lang="en-US" altLang="ja-JP" sz="2400" dirty="0"/>
-          </a:p>
-        </p:txBody>
-      </p:sp>
+        </p:spPr>
+      </p:pic>
     </p:spTree>
     <p:extLst>
       <p:ext uri="{BB962C8B-B14F-4D97-AF65-F5344CB8AC3E}">
-        <p14:creationId xmlns:p14="http://schemas.microsoft.com/office/powerpoint/2010/main" val="1628627159"/>
+        <p14:creationId xmlns:p14="http://schemas.microsoft.com/office/powerpoint/2010/main" val="889169730"/>
       </p:ext>
     </p:extLst>
   </p:cSld>
@@ -4512,7 +4513,7 @@
         <p:spPr>
           <a:xfrm>
             <a:off x="567542" y="1216429"/>
-            <a:ext cx="6694461" cy="461665"/>
+            <a:ext cx="6386685" cy="461665"/>
           </a:xfrm>
           <a:prstGeom prst="rect">
             <a:avLst/>
@@ -4526,28 +4527,24 @@
           <a:lstStyle/>
           <a:p>
             <a:r>
-              <a:rPr lang="ja-JP" altLang="en-US" sz="2400" dirty="0"/>
-              <a:t>つづいて</a:t>
-            </a:r>
-            <a:r>
-              <a:rPr lang="en-US" altLang="ja-JP" sz="2400" b="1" dirty="0">
+              <a:rPr lang="en-US" altLang="ja-JP" sz="2400" b="1" dirty="0" err="1">
                 <a:solidFill>
-                  <a:srgbClr val="7030A0"/>
+                  <a:srgbClr val="0070C0"/>
                 </a:solidFill>
               </a:rPr>
-              <a:t>Server</a:t>
+              <a:t>ReceiveData</a:t>
             </a:r>
             <a:r>
               <a:rPr lang="ja-JP" altLang="en-US" sz="2400" b="1" dirty="0">
                 <a:solidFill>
-                  <a:srgbClr val="7030A0"/>
+                  <a:srgbClr val="0070C0"/>
                 </a:solidFill>
               </a:rPr>
-              <a:t>プロジェクト</a:t>
+              <a:t>関数</a:t>
             </a:r>
             <a:r>
               <a:rPr lang="ja-JP" altLang="en-US" sz="2400" dirty="0"/>
-              <a:t>を開きましょう。</a:t>
+              <a:t>に受信処理を追加します。</a:t>
             </a:r>
             <a:endParaRPr kumimoji="1" lang="en-US" altLang="ja-JP" sz="2400" dirty="0"/>
           </a:p>
@@ -4555,10 +4552,10 @@
       </p:sp>
       <p:pic>
         <p:nvPicPr>
-          <p:cNvPr id="5" name="図 4">
-            <a:extLst>
-              <a:ext uri="{FF2B5EF4-FFF2-40B4-BE49-F238E27FC236}">
-                <a16:creationId xmlns:a16="http://schemas.microsoft.com/office/drawing/2014/main" id="{6E8773F9-30EC-4F44-A601-6D2F998C130B}"/>
+          <p:cNvPr id="3" name="図 2">
+            <a:extLst>
+              <a:ext uri="{FF2B5EF4-FFF2-40B4-BE49-F238E27FC236}">
+                <a16:creationId xmlns:a16="http://schemas.microsoft.com/office/drawing/2014/main" id="{4A8E5FAE-27F9-4750-A2E4-361B0B7EAED6}"/>
               </a:ext>
             </a:extLst>
           </p:cNvPr>
@@ -4576,17 +4573,92 @@
         <p:spPr>
           <a:xfrm>
             <a:off x="567542" y="1817794"/>
-            <a:ext cx="8407125" cy="4518830"/>
+            <a:ext cx="8602275" cy="2000529"/>
           </a:xfrm>
           <a:prstGeom prst="rect">
             <a:avLst/>
           </a:prstGeom>
         </p:spPr>
       </p:pic>
+      <p:sp>
+        <p:nvSpPr>
+          <p:cNvPr id="8" name="テキスト ボックス 7">
+            <a:extLst>
+              <a:ext uri="{FF2B5EF4-FFF2-40B4-BE49-F238E27FC236}">
+                <a16:creationId xmlns:a16="http://schemas.microsoft.com/office/drawing/2014/main" id="{BD37E74D-08AD-44F6-97D8-8B7FA0F6750F}"/>
+              </a:ext>
+            </a:extLst>
+          </p:cNvPr>
+          <p:cNvSpPr txBox="1"/>
+          <p:nvPr/>
+        </p:nvSpPr>
+        <p:spPr>
+          <a:xfrm>
+            <a:off x="567541" y="3973911"/>
+            <a:ext cx="6694461" cy="830997"/>
+          </a:xfrm>
+          <a:prstGeom prst="rect">
+            <a:avLst/>
+          </a:prstGeom>
+          <a:noFill/>
+        </p:spPr>
+        <p:txBody>
+          <a:bodyPr wrap="none" rtlCol="0">
+            <a:spAutoFit/>
+          </a:bodyPr>
+          <a:lstStyle/>
+          <a:p>
+            <a:r>
+              <a:rPr lang="en-US" altLang="ja-JP" sz="2400" b="1" dirty="0" err="1">
+                <a:solidFill>
+                  <a:srgbClr val="0070C0"/>
+                </a:solidFill>
+              </a:rPr>
+              <a:t>ReceiveData</a:t>
+            </a:r>
+            <a:r>
+              <a:rPr lang="ja-JP" altLang="en-US" sz="2400" b="1" dirty="0">
+                <a:solidFill>
+                  <a:srgbClr val="0070C0"/>
+                </a:solidFill>
+              </a:rPr>
+              <a:t>関数</a:t>
+            </a:r>
+            <a:r>
+              <a:rPr lang="ja-JP" altLang="en-US" sz="2400" dirty="0"/>
+              <a:t>は毎フレーム呼び出します。</a:t>
+            </a:r>
+            <a:endParaRPr lang="en-US" altLang="ja-JP" sz="2400" dirty="0"/>
+          </a:p>
+          <a:p>
+            <a:r>
+              <a:rPr kumimoji="1" lang="en-US" altLang="ja-JP" sz="2400" b="1" dirty="0">
+                <a:solidFill>
+                  <a:srgbClr val="0070C0"/>
+                </a:solidFill>
+              </a:rPr>
+              <a:t>Update</a:t>
+            </a:r>
+            <a:r>
+              <a:rPr kumimoji="1" lang="ja-JP" altLang="en-US" sz="2400" b="1" dirty="0">
+                <a:solidFill>
+                  <a:srgbClr val="0070C0"/>
+                </a:solidFill>
+              </a:rPr>
+              <a:t>関数</a:t>
+            </a:r>
+            <a:r>
+              <a:rPr kumimoji="1" lang="ja-JP" altLang="en-US" sz="2400" dirty="0"/>
+              <a:t>を確認しましょう。</a:t>
+            </a:r>
+            <a:endParaRPr kumimoji="1" lang="en-US" altLang="ja-JP" sz="2400" dirty="0"/>
+          </a:p>
+        </p:txBody>
+      </p:sp>
     </p:spTree>
     <p:extLst>
       <p:ext uri="{BB962C8B-B14F-4D97-AF65-F5344CB8AC3E}">
-        <p14:creationId xmlns:p14="http://schemas.microsoft.com/office/powerpoint/2010/main" val="1460932794"/>
+        <p14:creationId xmlns:p14="http://schemas.microsoft.com/office/powerpoint/2010/main" val="1628627159"/>
       </p:ext>
     </p:extLst>
   </p:cSld>
@@ -6756,7 +6828,7 @@
         <p:spPr>
           <a:xfrm>
             <a:off x="567542" y="1216429"/>
-            <a:ext cx="10724411" cy="461665"/>
+            <a:ext cx="6694461" cy="461665"/>
           </a:xfrm>
           <a:prstGeom prst="rect">
             <a:avLst/>
@@ -6770,24 +6842,28 @@
           <a:lstStyle/>
           <a:p>
             <a:r>
-              <a:rPr kumimoji="1" lang="en-US" altLang="ja-JP" sz="2400" b="1" dirty="0" err="1">
+              <a:rPr lang="ja-JP" altLang="en-US" sz="2400" dirty="0"/>
+              <a:t>つづいて</a:t>
+            </a:r>
+            <a:r>
+              <a:rPr lang="en-US" altLang="ja-JP" sz="2400" b="1" dirty="0">
                 <a:solidFill>
-                  <a:srgbClr val="FF0000"/>
+                  <a:srgbClr val="7030A0"/>
                 </a:solidFill>
               </a:rPr>
-              <a:t>NetworkCommonParam.h</a:t>
+              <a:t>Server</a:t>
+            </a:r>
+            <a:r>
+              <a:rPr lang="ja-JP" altLang="en-US" sz="2400" b="1" dirty="0">
+                <a:solidFill>
+                  <a:srgbClr val="7030A0"/>
+                </a:solidFill>
+              </a:rPr>
+              <a:t>プロジェクト</a:t>
             </a:r>
             <a:r>
               <a:rPr lang="ja-JP" altLang="en-US" sz="2400" dirty="0"/>
-              <a:t>に</a:t>
-            </a:r>
-            <a:r>
-              <a:rPr lang="en-US" altLang="ja-JP" sz="2400" dirty="0"/>
-              <a:t>Client</a:t>
-            </a:r>
-            <a:r>
-              <a:rPr lang="ja-JP" altLang="en-US" sz="2400" dirty="0"/>
-              <a:t>で追加したデータをコピーしましょう。</a:t>
+              <a:t>を開きましょう。</a:t>
             </a:r>
             <a:endParaRPr kumimoji="1" lang="en-US" altLang="ja-JP" sz="2400" dirty="0"/>
           </a:p>
@@ -6798,7 +6874,7 @@
           <p:cNvPr id="5" name="図 4">
             <a:extLst>
               <a:ext uri="{FF2B5EF4-FFF2-40B4-BE49-F238E27FC236}">
-                <a16:creationId xmlns:a16="http://schemas.microsoft.com/office/drawing/2014/main" id="{3F671132-E53D-4471-B17E-1CF66C4E123F}"/>
+                <a16:creationId xmlns:a16="http://schemas.microsoft.com/office/drawing/2014/main" id="{6E8773F9-30EC-4F44-A601-6D2F998C130B}"/>
               </a:ext>
             </a:extLst>
           </p:cNvPr>
@@ -6815,8 +6891,8 @@
         </p:blipFill>
         <p:spPr>
           <a:xfrm>
-            <a:off x="567542" y="2187126"/>
-            <a:ext cx="8002932" cy="2994474"/>
+            <a:off x="567542" y="1817794"/>
+            <a:ext cx="8407125" cy="4518830"/>
           </a:xfrm>
           <a:prstGeom prst="rect">
             <a:avLst/>
@@ -6826,7 +6902,7 @@
     </p:spTree>
     <p:extLst>
       <p:ext uri="{BB962C8B-B14F-4D97-AF65-F5344CB8AC3E}">
-        <p14:creationId xmlns:p14="http://schemas.microsoft.com/office/powerpoint/2010/main" val="1656401941"/>
+        <p14:creationId xmlns:p14="http://schemas.microsoft.com/office/powerpoint/2010/main" val="1460932794"/>
       </p:ext>
     </p:extLst>
   </p:cSld>
@@ -6903,7 +6979,7 @@
         <p:spPr>
           <a:xfrm>
             <a:off x="567542" y="1216429"/>
-            <a:ext cx="11574002" cy="461665"/>
+            <a:ext cx="10724411" cy="461665"/>
           </a:xfrm>
           <a:prstGeom prst="rect">
             <a:avLst/>
@@ -6916,49 +6992,25 @@
           </a:bodyPr>
           <a:lstStyle/>
           <a:p>
-            <a:r>
-              <a:rPr kumimoji="1" lang="en-US" altLang="ja-JP" sz="2400" b="1" dirty="0">
-                <a:solidFill>
-                  <a:srgbClr val="00B050"/>
-                </a:solidFill>
-              </a:rPr>
-              <a:t>Server</a:t>
-            </a:r>
-            <a:r>
-              <a:rPr kumimoji="1" lang="ja-JP" altLang="en-US" sz="2400" b="1" dirty="0">
-                <a:solidFill>
-                  <a:srgbClr val="00B050"/>
-                </a:solidFill>
-              </a:rPr>
-              <a:t>クラス</a:t>
-            </a:r>
-            <a:r>
-              <a:rPr kumimoji="1" lang="en-US" altLang="ja-JP" sz="2400" b="1" dirty="0">
-                <a:solidFill>
-                  <a:srgbClr val="FF0000"/>
-                </a:solidFill>
-              </a:rPr>
-              <a:t>(</a:t>
-            </a:r>
             <a:r>
               <a:rPr kumimoji="1" lang="en-US" altLang="ja-JP" sz="2400" b="1" dirty="0" err="1">
                 <a:solidFill>
                   <a:srgbClr val="FF0000"/>
                 </a:solidFill>
               </a:rPr>
-              <a:t>Server.h</a:t>
-            </a:r>
-            <a:r>
-              <a:rPr kumimoji="1" lang="en-US" altLang="ja-JP" sz="2400" b="1" dirty="0">
-                <a:solidFill>
-                  <a:srgbClr val="FF0000"/>
-                </a:solidFill>
-              </a:rPr>
-              <a:t>)</a:t>
-            </a:r>
-            <a:r>
-              <a:rPr kumimoji="1" lang="ja-JP" altLang="en-US" sz="2400" dirty="0"/>
-              <a:t>に受信したチャットデータ用のメンバ変数を追加します。</a:t>
+              <a:t>NetworkCommonParam.h</a:t>
+            </a:r>
+            <a:r>
+              <a:rPr lang="ja-JP" altLang="en-US" sz="2400" dirty="0"/>
+              <a:t>に</a:t>
+            </a:r>
+            <a:r>
+              <a:rPr lang="en-US" altLang="ja-JP" sz="2400" dirty="0"/>
+              <a:t>Client</a:t>
+            </a:r>
+            <a:r>
+              <a:rPr lang="ja-JP" altLang="en-US" sz="2400" dirty="0"/>
+              <a:t>で追加したデータをコピーしましょう。</a:t>
             </a:r>
             <a:endParaRPr kumimoji="1" lang="en-US" altLang="ja-JP" sz="2400" dirty="0"/>
           </a:p>
@@ -6966,10 +7018,10 @@
       </p:sp>
       <p:pic>
         <p:nvPicPr>
-          <p:cNvPr id="3" name="図 2">
-            <a:extLst>
-              <a:ext uri="{FF2B5EF4-FFF2-40B4-BE49-F238E27FC236}">
-                <a16:creationId xmlns:a16="http://schemas.microsoft.com/office/drawing/2014/main" id="{396AE614-71E3-49C3-A211-7B2F3F8FCFC5}"/>
+          <p:cNvPr id="5" name="図 4">
+            <a:extLst>
+              <a:ext uri="{FF2B5EF4-FFF2-40B4-BE49-F238E27FC236}">
+                <a16:creationId xmlns:a16="http://schemas.microsoft.com/office/drawing/2014/main" id="{3F671132-E53D-4471-B17E-1CF66C4E123F}"/>
               </a:ext>
             </a:extLst>
           </p:cNvPr>
@@ -6986,70 +7038,18 @@
         </p:blipFill>
         <p:spPr>
           <a:xfrm>
-            <a:off x="567542" y="1817793"/>
-            <a:ext cx="6625042" cy="1721273"/>
+            <a:off x="567542" y="2187126"/>
+            <a:ext cx="8002932" cy="2994474"/>
           </a:xfrm>
           <a:prstGeom prst="rect">
             <a:avLst/>
           </a:prstGeom>
         </p:spPr>
       </p:pic>
-      <p:sp>
-        <p:nvSpPr>
-          <p:cNvPr id="7" name="正方形/長方形 6">
-            <a:extLst>
-              <a:ext uri="{FF2B5EF4-FFF2-40B4-BE49-F238E27FC236}">
-                <a16:creationId xmlns:a16="http://schemas.microsoft.com/office/drawing/2014/main" id="{24D0C94B-8829-428D-A84D-4C88649CCEF2}"/>
-              </a:ext>
-            </a:extLst>
-          </p:cNvPr>
-          <p:cNvSpPr/>
-          <p:nvPr/>
-        </p:nvSpPr>
-        <p:spPr>
-          <a:xfrm>
-            <a:off x="2531534" y="2345266"/>
-            <a:ext cx="4661050" cy="618067"/>
-          </a:xfrm>
-          <a:prstGeom prst="rect">
-            <a:avLst/>
-          </a:prstGeom>
-          <a:noFill/>
-          <a:ln w="38100">
-            <a:solidFill>
-              <a:srgbClr val="FF0000"/>
-            </a:solidFill>
-          </a:ln>
-        </p:spPr>
-        <p:style>
-          <a:lnRef idx="2">
-            <a:schemeClr val="accent1">
-              <a:shade val="50000"/>
-            </a:schemeClr>
-          </a:lnRef>
-          <a:fillRef idx="1">
-            <a:schemeClr val="accent1"/>
-          </a:fillRef>
-          <a:effectRef idx="0">
-            <a:schemeClr val="accent1"/>
-          </a:effectRef>
-          <a:fontRef idx="minor">
-            <a:schemeClr val="lt1"/>
-          </a:fontRef>
-        </p:style>
-        <p:txBody>
-          <a:bodyPr rtlCol="0" anchor="ctr"/>
-          <a:lstStyle/>
-          <a:p>
-            <a:pPr algn="ctr"/>
-            <a:endParaRPr kumimoji="1" lang="ja-JP" altLang="en-US"/>
-          </a:p>
-        </p:txBody>
-      </p:sp>
     </p:spTree>
     <p:extLst>
       <p:ext uri="{BB962C8B-B14F-4D97-AF65-F5344CB8AC3E}">
-        <p14:creationId xmlns:p14="http://schemas.microsoft.com/office/powerpoint/2010/main" val="1379912275"/>
+        <p14:creationId xmlns:p14="http://schemas.microsoft.com/office/powerpoint/2010/main" val="1656401941"/>
       </p:ext>
     </p:extLst>
   </p:cSld>
